--- a/slides/Components.pptx
+++ b/slides/Components.pptx
@@ -6,6 +6,9 @@
   </p:sldMasterIdLst>
   <p:sldIdLst>
     <p:sldId id="256" r:id="rId2"/>
+    <p:sldId id="258" r:id="rId3"/>
+    <p:sldId id="257" r:id="rId4"/>
+    <p:sldId id="259" r:id="rId5"/>
   </p:sldIdLst>
   <p:sldSz cx="12192000" cy="6858000"/>
   <p:notesSz cx="6858000" cy="9144000"/>
@@ -104,6 +107,11 @@
       </a:defRPr>
     </a:lvl9pPr>
   </p:defaultTextStyle>
+  <p:extLst>
+    <p:ext uri="{EFAFB233-063F-42B5-8137-9DF3F51BA10A}">
+      <p15:sldGuideLst xmlns:p15="http://schemas.microsoft.com/office/powerpoint/2012/main"/>
+    </p:ext>
+  </p:extLst>
 </p:presentation>
 </file>
 
@@ -254,7 +262,7 @@
           <a:p>
             <a:fld id="{02E7B1C8-3A10-4C49-89E2-D9342D491E6C}" type="datetimeFigureOut">
               <a:rPr lang="en-US" smtClean="0"/>
-              <a:t>9/23/24</a:t>
+              <a:t>3/5/25</a:t>
             </a:fld>
             <a:endParaRPr lang="en-US"/>
           </a:p>
@@ -452,7 +460,7 @@
           <a:p>
             <a:fld id="{02E7B1C8-3A10-4C49-89E2-D9342D491E6C}" type="datetimeFigureOut">
               <a:rPr lang="en-US" smtClean="0"/>
-              <a:t>9/23/24</a:t>
+              <a:t>3/5/25</a:t>
             </a:fld>
             <a:endParaRPr lang="en-US"/>
           </a:p>
@@ -660,7 +668,7 @@
           <a:p>
             <a:fld id="{02E7B1C8-3A10-4C49-89E2-D9342D491E6C}" type="datetimeFigureOut">
               <a:rPr lang="en-US" smtClean="0"/>
-              <a:t>9/23/24</a:t>
+              <a:t>3/5/25</a:t>
             </a:fld>
             <a:endParaRPr lang="en-US"/>
           </a:p>
@@ -858,7 +866,7 @@
           <a:p>
             <a:fld id="{02E7B1C8-3A10-4C49-89E2-D9342D491E6C}" type="datetimeFigureOut">
               <a:rPr lang="en-US" smtClean="0"/>
-              <a:t>9/23/24</a:t>
+              <a:t>3/5/25</a:t>
             </a:fld>
             <a:endParaRPr lang="en-US"/>
           </a:p>
@@ -1133,7 +1141,7 @@
           <a:p>
             <a:fld id="{02E7B1C8-3A10-4C49-89E2-D9342D491E6C}" type="datetimeFigureOut">
               <a:rPr lang="en-US" smtClean="0"/>
-              <a:t>9/23/24</a:t>
+              <a:t>3/5/25</a:t>
             </a:fld>
             <a:endParaRPr lang="en-US"/>
           </a:p>
@@ -1398,7 +1406,7 @@
           <a:p>
             <a:fld id="{02E7B1C8-3A10-4C49-89E2-D9342D491E6C}" type="datetimeFigureOut">
               <a:rPr lang="en-US" smtClean="0"/>
-              <a:t>9/23/24</a:t>
+              <a:t>3/5/25</a:t>
             </a:fld>
             <a:endParaRPr lang="en-US"/>
           </a:p>
@@ -1810,7 +1818,7 @@
           <a:p>
             <a:fld id="{02E7B1C8-3A10-4C49-89E2-D9342D491E6C}" type="datetimeFigureOut">
               <a:rPr lang="en-US" smtClean="0"/>
-              <a:t>9/23/24</a:t>
+              <a:t>3/5/25</a:t>
             </a:fld>
             <a:endParaRPr lang="en-US"/>
           </a:p>
@@ -1951,7 +1959,7 @@
           <a:p>
             <a:fld id="{02E7B1C8-3A10-4C49-89E2-D9342D491E6C}" type="datetimeFigureOut">
               <a:rPr lang="en-US" smtClean="0"/>
-              <a:t>9/23/24</a:t>
+              <a:t>3/5/25</a:t>
             </a:fld>
             <a:endParaRPr lang="en-US"/>
           </a:p>
@@ -2064,7 +2072,7 @@
           <a:p>
             <a:fld id="{02E7B1C8-3A10-4C49-89E2-D9342D491E6C}" type="datetimeFigureOut">
               <a:rPr lang="en-US" smtClean="0"/>
-              <a:t>9/23/24</a:t>
+              <a:t>3/5/25</a:t>
             </a:fld>
             <a:endParaRPr lang="en-US"/>
           </a:p>
@@ -2375,7 +2383,7 @@
           <a:p>
             <a:fld id="{02E7B1C8-3A10-4C49-89E2-D9342D491E6C}" type="datetimeFigureOut">
               <a:rPr lang="en-US" smtClean="0"/>
-              <a:t>9/23/24</a:t>
+              <a:t>3/5/25</a:t>
             </a:fld>
             <a:endParaRPr lang="en-US"/>
           </a:p>
@@ -2663,7 +2671,7 @@
           <a:p>
             <a:fld id="{02E7B1C8-3A10-4C49-89E2-D9342D491E6C}" type="datetimeFigureOut">
               <a:rPr lang="en-US" smtClean="0"/>
-              <a:t>9/23/24</a:t>
+              <a:t>3/5/25</a:t>
             </a:fld>
             <a:endParaRPr lang="en-US"/>
           </a:p>
@@ -2904,7 +2912,7 @@
           <a:p>
             <a:fld id="{02E7B1C8-3A10-4C49-89E2-D9342D491E6C}" type="datetimeFigureOut">
               <a:rPr lang="en-US" smtClean="0"/>
-              <a:t>9/23/24</a:t>
+              <a:t>3/5/25</a:t>
             </a:fld>
             <a:endParaRPr lang="en-US"/>
           </a:p>
@@ -3342,7 +3350,10 @@
           <a:bodyPr/>
           <a:lstStyle/>
           <a:p>
-            <a:endParaRPr lang="en-US"/>
+            <a:r>
+              <a:rPr lang="en-US" dirty="0"/>
+              <a:t>Components</a:t>
+            </a:r>
           </a:p>
         </p:txBody>
       </p:sp>
@@ -3375,6 +3386,3558 @@
     <p:extLst>
       <p:ext uri="{BB962C8B-B14F-4D97-AF65-F5344CB8AC3E}">
         <p14:creationId xmlns:p14="http://schemas.microsoft.com/office/powerpoint/2010/main" val="2431493094"/>
+      </p:ext>
+    </p:extLst>
+  </p:cSld>
+  <p:clrMapOvr>
+    <a:masterClrMapping/>
+  </p:clrMapOvr>
+</p:sld>
+</file>
+
+<file path=ppt/slides/slide2.xml><?xml version="1.0" encoding="utf-8"?>
+<p:sld xmlns:a="http://schemas.openxmlformats.org/drawingml/2006/main" xmlns:r="http://schemas.openxmlformats.org/officeDocument/2006/relationships" xmlns:p="http://schemas.openxmlformats.org/presentationml/2006/main">
+  <p:cSld>
+    <p:spTree>
+      <p:nvGrpSpPr>
+        <p:cNvPr id="1" name=""/>
+        <p:cNvGrpSpPr/>
+        <p:nvPr/>
+      </p:nvGrpSpPr>
+      <p:grpSpPr>
+        <a:xfrm>
+          <a:off x="0" y="0"/>
+          <a:ext cx="0" cy="0"/>
+          <a:chOff x="0" y="0"/>
+          <a:chExt cx="0" cy="0"/>
+        </a:xfrm>
+      </p:grpSpPr>
+      <p:sp>
+        <p:nvSpPr>
+          <p:cNvPr id="2" name="Title 1">
+            <a:extLst>
+              <a:ext uri="{FF2B5EF4-FFF2-40B4-BE49-F238E27FC236}">
+                <a16:creationId xmlns:a16="http://schemas.microsoft.com/office/drawing/2014/main" id="{AC14054E-4959-4767-3541-2B739D2B54B0}"/>
+              </a:ext>
+            </a:extLst>
+          </p:cNvPr>
+          <p:cNvSpPr>
+            <a:spLocks noGrp="1"/>
+          </p:cNvSpPr>
+          <p:nvPr>
+            <p:ph type="title"/>
+          </p:nvPr>
+        </p:nvSpPr>
+        <p:spPr/>
+        <p:txBody>
+          <a:bodyPr/>
+          <a:lstStyle/>
+          <a:p>
+            <a:r>
+              <a:rPr lang="en-US" dirty="0"/>
+              <a:t>Resistor</a:t>
+            </a:r>
+          </a:p>
+        </p:txBody>
+      </p:sp>
+      <p:sp>
+        <p:nvSpPr>
+          <p:cNvPr id="3" name="Content Placeholder 2">
+            <a:extLst>
+              <a:ext uri="{FF2B5EF4-FFF2-40B4-BE49-F238E27FC236}">
+                <a16:creationId xmlns:a16="http://schemas.microsoft.com/office/drawing/2014/main" id="{85C8904D-FFCB-0D09-6A72-39BF95AF1DD7}"/>
+              </a:ext>
+            </a:extLst>
+          </p:cNvPr>
+          <p:cNvSpPr>
+            <a:spLocks noGrp="1"/>
+          </p:cNvSpPr>
+          <p:nvPr>
+            <p:ph idx="1"/>
+          </p:nvPr>
+        </p:nvSpPr>
+        <p:spPr>
+          <a:xfrm>
+            <a:off x="838200" y="4287795"/>
+            <a:ext cx="10515600" cy="1889168"/>
+          </a:xfrm>
+        </p:spPr>
+        <p:txBody>
+          <a:bodyPr/>
+          <a:lstStyle/>
+          <a:p>
+            <a:endParaRPr lang="en-US" dirty="0"/>
+          </a:p>
+        </p:txBody>
+      </p:sp>
+      <p:pic>
+        <p:nvPicPr>
+          <p:cNvPr id="4" name="Picture 3">
+            <a:extLst>
+              <a:ext uri="{FF2B5EF4-FFF2-40B4-BE49-F238E27FC236}">
+                <a16:creationId xmlns:a16="http://schemas.microsoft.com/office/drawing/2014/main" id="{135D2647-4BC5-439D-E04C-336938E9C923}"/>
+              </a:ext>
+            </a:extLst>
+          </p:cNvPr>
+          <p:cNvPicPr>
+            <a:picLocks noChangeAspect="1"/>
+          </p:cNvPicPr>
+          <p:nvPr/>
+        </p:nvPicPr>
+        <p:blipFill>
+          <a:blip r:embed="rId2"/>
+          <a:stretch>
+            <a:fillRect/>
+          </a:stretch>
+        </p:blipFill>
+        <p:spPr>
+          <a:xfrm>
+            <a:off x="3596293" y="681037"/>
+            <a:ext cx="6746596" cy="1648599"/>
+          </a:xfrm>
+          <a:prstGeom prst="rect">
+            <a:avLst/>
+          </a:prstGeom>
+        </p:spPr>
+      </p:pic>
+      <p:sp>
+        <p:nvSpPr>
+          <p:cNvPr id="5" name="Freeform 4">
+            <a:extLst>
+              <a:ext uri="{FF2B5EF4-FFF2-40B4-BE49-F238E27FC236}">
+                <a16:creationId xmlns:a16="http://schemas.microsoft.com/office/drawing/2014/main" id="{C136CCA3-3BBB-37E0-9151-86B7C1206A92}"/>
+              </a:ext>
+            </a:extLst>
+          </p:cNvPr>
+          <p:cNvSpPr/>
+          <p:nvPr/>
+        </p:nvSpPr>
+        <p:spPr>
+          <a:xfrm>
+            <a:off x="1964724" y="2187146"/>
+            <a:ext cx="6635579" cy="1161535"/>
+          </a:xfrm>
+          <a:custGeom>
+            <a:avLst/>
+            <a:gdLst>
+              <a:gd name="connsiteX0" fmla="*/ 0 w 6635579"/>
+              <a:gd name="connsiteY0" fmla="*/ 580768 h 1172959"/>
+              <a:gd name="connsiteX1" fmla="*/ 1470454 w 6635579"/>
+              <a:gd name="connsiteY1" fmla="*/ 580768 h 1172959"/>
+              <a:gd name="connsiteX2" fmla="*/ 1779373 w 6635579"/>
+              <a:gd name="connsiteY2" fmla="*/ 24713 h 1172959"/>
+              <a:gd name="connsiteX3" fmla="*/ 2409568 w 6635579"/>
+              <a:gd name="connsiteY3" fmla="*/ 1161535 h 1172959"/>
+              <a:gd name="connsiteX4" fmla="*/ 3039762 w 6635579"/>
+              <a:gd name="connsiteY4" fmla="*/ 37070 h 1172959"/>
+              <a:gd name="connsiteX5" fmla="*/ 3645244 w 6635579"/>
+              <a:gd name="connsiteY5" fmla="*/ 1161535 h 1172959"/>
+              <a:gd name="connsiteX6" fmla="*/ 4275438 w 6635579"/>
+              <a:gd name="connsiteY6" fmla="*/ 0 h 1172959"/>
+              <a:gd name="connsiteX7" fmla="*/ 4917990 w 6635579"/>
+              <a:gd name="connsiteY7" fmla="*/ 1161535 h 1172959"/>
+              <a:gd name="connsiteX8" fmla="*/ 5263979 w 6635579"/>
+              <a:gd name="connsiteY8" fmla="*/ 593124 h 1172959"/>
+              <a:gd name="connsiteX9" fmla="*/ 6635579 w 6635579"/>
+              <a:gd name="connsiteY9" fmla="*/ 593124 h 1172959"/>
+              <a:gd name="connsiteX10" fmla="*/ 6635579 w 6635579"/>
+              <a:gd name="connsiteY10" fmla="*/ 593124 h 1172959"/>
+              <a:gd name="connsiteX11" fmla="*/ 6635579 w 6635579"/>
+              <a:gd name="connsiteY11" fmla="*/ 593124 h 1172959"/>
+              <a:gd name="connsiteX0" fmla="*/ 0 w 6635579"/>
+              <a:gd name="connsiteY0" fmla="*/ 580768 h 1172959"/>
+              <a:gd name="connsiteX1" fmla="*/ 1470454 w 6635579"/>
+              <a:gd name="connsiteY1" fmla="*/ 580768 h 1172959"/>
+              <a:gd name="connsiteX2" fmla="*/ 1779373 w 6635579"/>
+              <a:gd name="connsiteY2" fmla="*/ 24713 h 1172959"/>
+              <a:gd name="connsiteX3" fmla="*/ 2409568 w 6635579"/>
+              <a:gd name="connsiteY3" fmla="*/ 1161535 h 1172959"/>
+              <a:gd name="connsiteX4" fmla="*/ 3039762 w 6635579"/>
+              <a:gd name="connsiteY4" fmla="*/ 37070 h 1172959"/>
+              <a:gd name="connsiteX5" fmla="*/ 3645244 w 6635579"/>
+              <a:gd name="connsiteY5" fmla="*/ 1161535 h 1172959"/>
+              <a:gd name="connsiteX6" fmla="*/ 4275438 w 6635579"/>
+              <a:gd name="connsiteY6" fmla="*/ 0 h 1172959"/>
+              <a:gd name="connsiteX7" fmla="*/ 4917990 w 6635579"/>
+              <a:gd name="connsiteY7" fmla="*/ 1161535 h 1172959"/>
+              <a:gd name="connsiteX8" fmla="*/ 5263979 w 6635579"/>
+              <a:gd name="connsiteY8" fmla="*/ 593124 h 1172959"/>
+              <a:gd name="connsiteX9" fmla="*/ 6635579 w 6635579"/>
+              <a:gd name="connsiteY9" fmla="*/ 593124 h 1172959"/>
+              <a:gd name="connsiteX10" fmla="*/ 6635579 w 6635579"/>
+              <a:gd name="connsiteY10" fmla="*/ 593124 h 1172959"/>
+              <a:gd name="connsiteX11" fmla="*/ 6635579 w 6635579"/>
+              <a:gd name="connsiteY11" fmla="*/ 593124 h 1172959"/>
+              <a:gd name="connsiteX0" fmla="*/ 0 w 6635579"/>
+              <a:gd name="connsiteY0" fmla="*/ 580768 h 1172959"/>
+              <a:gd name="connsiteX1" fmla="*/ 1470454 w 6635579"/>
+              <a:gd name="connsiteY1" fmla="*/ 580768 h 1172959"/>
+              <a:gd name="connsiteX2" fmla="*/ 1779373 w 6635579"/>
+              <a:gd name="connsiteY2" fmla="*/ 24713 h 1172959"/>
+              <a:gd name="connsiteX3" fmla="*/ 2409568 w 6635579"/>
+              <a:gd name="connsiteY3" fmla="*/ 1161535 h 1172959"/>
+              <a:gd name="connsiteX4" fmla="*/ 3039762 w 6635579"/>
+              <a:gd name="connsiteY4" fmla="*/ 37070 h 1172959"/>
+              <a:gd name="connsiteX5" fmla="*/ 3645244 w 6635579"/>
+              <a:gd name="connsiteY5" fmla="*/ 1161535 h 1172959"/>
+              <a:gd name="connsiteX6" fmla="*/ 4275438 w 6635579"/>
+              <a:gd name="connsiteY6" fmla="*/ 0 h 1172959"/>
+              <a:gd name="connsiteX7" fmla="*/ 4917990 w 6635579"/>
+              <a:gd name="connsiteY7" fmla="*/ 1161535 h 1172959"/>
+              <a:gd name="connsiteX8" fmla="*/ 5263979 w 6635579"/>
+              <a:gd name="connsiteY8" fmla="*/ 593124 h 1172959"/>
+              <a:gd name="connsiteX9" fmla="*/ 6635579 w 6635579"/>
+              <a:gd name="connsiteY9" fmla="*/ 593124 h 1172959"/>
+              <a:gd name="connsiteX10" fmla="*/ 6635579 w 6635579"/>
+              <a:gd name="connsiteY10" fmla="*/ 593124 h 1172959"/>
+              <a:gd name="connsiteX11" fmla="*/ 6635579 w 6635579"/>
+              <a:gd name="connsiteY11" fmla="*/ 593124 h 1172959"/>
+              <a:gd name="connsiteX0" fmla="*/ 0 w 6635579"/>
+              <a:gd name="connsiteY0" fmla="*/ 580768 h 1172959"/>
+              <a:gd name="connsiteX1" fmla="*/ 1470454 w 6635579"/>
+              <a:gd name="connsiteY1" fmla="*/ 580768 h 1172959"/>
+              <a:gd name="connsiteX2" fmla="*/ 1779373 w 6635579"/>
+              <a:gd name="connsiteY2" fmla="*/ 24713 h 1172959"/>
+              <a:gd name="connsiteX3" fmla="*/ 2409568 w 6635579"/>
+              <a:gd name="connsiteY3" fmla="*/ 1161535 h 1172959"/>
+              <a:gd name="connsiteX4" fmla="*/ 3039762 w 6635579"/>
+              <a:gd name="connsiteY4" fmla="*/ 37070 h 1172959"/>
+              <a:gd name="connsiteX5" fmla="*/ 3645244 w 6635579"/>
+              <a:gd name="connsiteY5" fmla="*/ 1161535 h 1172959"/>
+              <a:gd name="connsiteX6" fmla="*/ 4275438 w 6635579"/>
+              <a:gd name="connsiteY6" fmla="*/ 0 h 1172959"/>
+              <a:gd name="connsiteX7" fmla="*/ 4917990 w 6635579"/>
+              <a:gd name="connsiteY7" fmla="*/ 1161535 h 1172959"/>
+              <a:gd name="connsiteX8" fmla="*/ 5263979 w 6635579"/>
+              <a:gd name="connsiteY8" fmla="*/ 593124 h 1172959"/>
+              <a:gd name="connsiteX9" fmla="*/ 6635579 w 6635579"/>
+              <a:gd name="connsiteY9" fmla="*/ 593124 h 1172959"/>
+              <a:gd name="connsiteX10" fmla="*/ 6635579 w 6635579"/>
+              <a:gd name="connsiteY10" fmla="*/ 593124 h 1172959"/>
+              <a:gd name="connsiteX11" fmla="*/ 6635579 w 6635579"/>
+              <a:gd name="connsiteY11" fmla="*/ 593124 h 1172959"/>
+              <a:gd name="connsiteX0" fmla="*/ 0 w 6635579"/>
+              <a:gd name="connsiteY0" fmla="*/ 580768 h 1172959"/>
+              <a:gd name="connsiteX1" fmla="*/ 1470454 w 6635579"/>
+              <a:gd name="connsiteY1" fmla="*/ 580768 h 1172959"/>
+              <a:gd name="connsiteX2" fmla="*/ 1779373 w 6635579"/>
+              <a:gd name="connsiteY2" fmla="*/ 24713 h 1172959"/>
+              <a:gd name="connsiteX3" fmla="*/ 2409568 w 6635579"/>
+              <a:gd name="connsiteY3" fmla="*/ 1161535 h 1172959"/>
+              <a:gd name="connsiteX4" fmla="*/ 3039762 w 6635579"/>
+              <a:gd name="connsiteY4" fmla="*/ 37070 h 1172959"/>
+              <a:gd name="connsiteX5" fmla="*/ 3645244 w 6635579"/>
+              <a:gd name="connsiteY5" fmla="*/ 1161535 h 1172959"/>
+              <a:gd name="connsiteX6" fmla="*/ 4275438 w 6635579"/>
+              <a:gd name="connsiteY6" fmla="*/ 0 h 1172959"/>
+              <a:gd name="connsiteX7" fmla="*/ 4917990 w 6635579"/>
+              <a:gd name="connsiteY7" fmla="*/ 1161535 h 1172959"/>
+              <a:gd name="connsiteX8" fmla="*/ 5263979 w 6635579"/>
+              <a:gd name="connsiteY8" fmla="*/ 593124 h 1172959"/>
+              <a:gd name="connsiteX9" fmla="*/ 6635579 w 6635579"/>
+              <a:gd name="connsiteY9" fmla="*/ 593124 h 1172959"/>
+              <a:gd name="connsiteX10" fmla="*/ 6635579 w 6635579"/>
+              <a:gd name="connsiteY10" fmla="*/ 593124 h 1172959"/>
+              <a:gd name="connsiteX11" fmla="*/ 6635579 w 6635579"/>
+              <a:gd name="connsiteY11" fmla="*/ 593124 h 1172959"/>
+              <a:gd name="connsiteX0" fmla="*/ 0 w 6635579"/>
+              <a:gd name="connsiteY0" fmla="*/ 580768 h 1172959"/>
+              <a:gd name="connsiteX1" fmla="*/ 1470454 w 6635579"/>
+              <a:gd name="connsiteY1" fmla="*/ 580768 h 1172959"/>
+              <a:gd name="connsiteX2" fmla="*/ 1779373 w 6635579"/>
+              <a:gd name="connsiteY2" fmla="*/ 24713 h 1172959"/>
+              <a:gd name="connsiteX3" fmla="*/ 2409568 w 6635579"/>
+              <a:gd name="connsiteY3" fmla="*/ 1161535 h 1172959"/>
+              <a:gd name="connsiteX4" fmla="*/ 3039762 w 6635579"/>
+              <a:gd name="connsiteY4" fmla="*/ 37070 h 1172959"/>
+              <a:gd name="connsiteX5" fmla="*/ 3645244 w 6635579"/>
+              <a:gd name="connsiteY5" fmla="*/ 1161535 h 1172959"/>
+              <a:gd name="connsiteX6" fmla="*/ 4275438 w 6635579"/>
+              <a:gd name="connsiteY6" fmla="*/ 0 h 1172959"/>
+              <a:gd name="connsiteX7" fmla="*/ 4917990 w 6635579"/>
+              <a:gd name="connsiteY7" fmla="*/ 1161535 h 1172959"/>
+              <a:gd name="connsiteX8" fmla="*/ 5263979 w 6635579"/>
+              <a:gd name="connsiteY8" fmla="*/ 593124 h 1172959"/>
+              <a:gd name="connsiteX9" fmla="*/ 6635579 w 6635579"/>
+              <a:gd name="connsiteY9" fmla="*/ 593124 h 1172959"/>
+              <a:gd name="connsiteX10" fmla="*/ 6635579 w 6635579"/>
+              <a:gd name="connsiteY10" fmla="*/ 593124 h 1172959"/>
+              <a:gd name="connsiteX11" fmla="*/ 6635579 w 6635579"/>
+              <a:gd name="connsiteY11" fmla="*/ 593124 h 1172959"/>
+              <a:gd name="connsiteX0" fmla="*/ 0 w 6635579"/>
+              <a:gd name="connsiteY0" fmla="*/ 580768 h 1172959"/>
+              <a:gd name="connsiteX1" fmla="*/ 1470454 w 6635579"/>
+              <a:gd name="connsiteY1" fmla="*/ 580768 h 1172959"/>
+              <a:gd name="connsiteX2" fmla="*/ 1779373 w 6635579"/>
+              <a:gd name="connsiteY2" fmla="*/ 24713 h 1172959"/>
+              <a:gd name="connsiteX3" fmla="*/ 2409568 w 6635579"/>
+              <a:gd name="connsiteY3" fmla="*/ 1161535 h 1172959"/>
+              <a:gd name="connsiteX4" fmla="*/ 3039762 w 6635579"/>
+              <a:gd name="connsiteY4" fmla="*/ 37070 h 1172959"/>
+              <a:gd name="connsiteX5" fmla="*/ 3645244 w 6635579"/>
+              <a:gd name="connsiteY5" fmla="*/ 1161535 h 1172959"/>
+              <a:gd name="connsiteX6" fmla="*/ 4275438 w 6635579"/>
+              <a:gd name="connsiteY6" fmla="*/ 0 h 1172959"/>
+              <a:gd name="connsiteX7" fmla="*/ 4917990 w 6635579"/>
+              <a:gd name="connsiteY7" fmla="*/ 1161535 h 1172959"/>
+              <a:gd name="connsiteX8" fmla="*/ 5263979 w 6635579"/>
+              <a:gd name="connsiteY8" fmla="*/ 593124 h 1172959"/>
+              <a:gd name="connsiteX9" fmla="*/ 6635579 w 6635579"/>
+              <a:gd name="connsiteY9" fmla="*/ 593124 h 1172959"/>
+              <a:gd name="connsiteX10" fmla="*/ 6635579 w 6635579"/>
+              <a:gd name="connsiteY10" fmla="*/ 593124 h 1172959"/>
+              <a:gd name="connsiteX11" fmla="*/ 6635579 w 6635579"/>
+              <a:gd name="connsiteY11" fmla="*/ 593124 h 1172959"/>
+              <a:gd name="connsiteX0" fmla="*/ 0 w 6635579"/>
+              <a:gd name="connsiteY0" fmla="*/ 580768 h 1172959"/>
+              <a:gd name="connsiteX1" fmla="*/ 1470454 w 6635579"/>
+              <a:gd name="connsiteY1" fmla="*/ 580768 h 1172959"/>
+              <a:gd name="connsiteX2" fmla="*/ 1779373 w 6635579"/>
+              <a:gd name="connsiteY2" fmla="*/ 24713 h 1172959"/>
+              <a:gd name="connsiteX3" fmla="*/ 2409568 w 6635579"/>
+              <a:gd name="connsiteY3" fmla="*/ 1161535 h 1172959"/>
+              <a:gd name="connsiteX4" fmla="*/ 3039762 w 6635579"/>
+              <a:gd name="connsiteY4" fmla="*/ 37070 h 1172959"/>
+              <a:gd name="connsiteX5" fmla="*/ 3645244 w 6635579"/>
+              <a:gd name="connsiteY5" fmla="*/ 1161535 h 1172959"/>
+              <a:gd name="connsiteX6" fmla="*/ 4275438 w 6635579"/>
+              <a:gd name="connsiteY6" fmla="*/ 0 h 1172959"/>
+              <a:gd name="connsiteX7" fmla="*/ 4917990 w 6635579"/>
+              <a:gd name="connsiteY7" fmla="*/ 1161535 h 1172959"/>
+              <a:gd name="connsiteX8" fmla="*/ 5263979 w 6635579"/>
+              <a:gd name="connsiteY8" fmla="*/ 593124 h 1172959"/>
+              <a:gd name="connsiteX9" fmla="*/ 6635579 w 6635579"/>
+              <a:gd name="connsiteY9" fmla="*/ 593124 h 1172959"/>
+              <a:gd name="connsiteX10" fmla="*/ 6635579 w 6635579"/>
+              <a:gd name="connsiteY10" fmla="*/ 593124 h 1172959"/>
+              <a:gd name="connsiteX11" fmla="*/ 6635579 w 6635579"/>
+              <a:gd name="connsiteY11" fmla="*/ 593124 h 1172959"/>
+              <a:gd name="connsiteX0" fmla="*/ 0 w 6635579"/>
+              <a:gd name="connsiteY0" fmla="*/ 580768 h 1172959"/>
+              <a:gd name="connsiteX1" fmla="*/ 1470454 w 6635579"/>
+              <a:gd name="connsiteY1" fmla="*/ 580768 h 1172959"/>
+              <a:gd name="connsiteX2" fmla="*/ 1779373 w 6635579"/>
+              <a:gd name="connsiteY2" fmla="*/ 24713 h 1172959"/>
+              <a:gd name="connsiteX3" fmla="*/ 2409568 w 6635579"/>
+              <a:gd name="connsiteY3" fmla="*/ 1161535 h 1172959"/>
+              <a:gd name="connsiteX4" fmla="*/ 3039762 w 6635579"/>
+              <a:gd name="connsiteY4" fmla="*/ 37070 h 1172959"/>
+              <a:gd name="connsiteX5" fmla="*/ 3645244 w 6635579"/>
+              <a:gd name="connsiteY5" fmla="*/ 1161535 h 1172959"/>
+              <a:gd name="connsiteX6" fmla="*/ 4275438 w 6635579"/>
+              <a:gd name="connsiteY6" fmla="*/ 0 h 1172959"/>
+              <a:gd name="connsiteX7" fmla="*/ 4917990 w 6635579"/>
+              <a:gd name="connsiteY7" fmla="*/ 1161535 h 1172959"/>
+              <a:gd name="connsiteX8" fmla="*/ 5263979 w 6635579"/>
+              <a:gd name="connsiteY8" fmla="*/ 593124 h 1172959"/>
+              <a:gd name="connsiteX9" fmla="*/ 6635579 w 6635579"/>
+              <a:gd name="connsiteY9" fmla="*/ 593124 h 1172959"/>
+              <a:gd name="connsiteX10" fmla="*/ 6635579 w 6635579"/>
+              <a:gd name="connsiteY10" fmla="*/ 593124 h 1172959"/>
+              <a:gd name="connsiteX11" fmla="*/ 6635579 w 6635579"/>
+              <a:gd name="connsiteY11" fmla="*/ 593124 h 1172959"/>
+              <a:gd name="connsiteX0" fmla="*/ 0 w 6635579"/>
+              <a:gd name="connsiteY0" fmla="*/ 580768 h 1172959"/>
+              <a:gd name="connsiteX1" fmla="*/ 1470454 w 6635579"/>
+              <a:gd name="connsiteY1" fmla="*/ 580768 h 1172959"/>
+              <a:gd name="connsiteX2" fmla="*/ 1779373 w 6635579"/>
+              <a:gd name="connsiteY2" fmla="*/ 24713 h 1172959"/>
+              <a:gd name="connsiteX3" fmla="*/ 2409568 w 6635579"/>
+              <a:gd name="connsiteY3" fmla="*/ 1161535 h 1172959"/>
+              <a:gd name="connsiteX4" fmla="*/ 3039762 w 6635579"/>
+              <a:gd name="connsiteY4" fmla="*/ 37070 h 1172959"/>
+              <a:gd name="connsiteX5" fmla="*/ 3645244 w 6635579"/>
+              <a:gd name="connsiteY5" fmla="*/ 1161535 h 1172959"/>
+              <a:gd name="connsiteX6" fmla="*/ 4275438 w 6635579"/>
+              <a:gd name="connsiteY6" fmla="*/ 0 h 1172959"/>
+              <a:gd name="connsiteX7" fmla="*/ 4917990 w 6635579"/>
+              <a:gd name="connsiteY7" fmla="*/ 1161535 h 1172959"/>
+              <a:gd name="connsiteX8" fmla="*/ 5263979 w 6635579"/>
+              <a:gd name="connsiteY8" fmla="*/ 593124 h 1172959"/>
+              <a:gd name="connsiteX9" fmla="*/ 6635579 w 6635579"/>
+              <a:gd name="connsiteY9" fmla="*/ 593124 h 1172959"/>
+              <a:gd name="connsiteX10" fmla="*/ 6635579 w 6635579"/>
+              <a:gd name="connsiteY10" fmla="*/ 593124 h 1172959"/>
+              <a:gd name="connsiteX11" fmla="*/ 6635579 w 6635579"/>
+              <a:gd name="connsiteY11" fmla="*/ 593124 h 1172959"/>
+              <a:gd name="connsiteX0" fmla="*/ 0 w 6635579"/>
+              <a:gd name="connsiteY0" fmla="*/ 580768 h 1172959"/>
+              <a:gd name="connsiteX1" fmla="*/ 1470454 w 6635579"/>
+              <a:gd name="connsiteY1" fmla="*/ 580768 h 1172959"/>
+              <a:gd name="connsiteX2" fmla="*/ 1779373 w 6635579"/>
+              <a:gd name="connsiteY2" fmla="*/ 24713 h 1172959"/>
+              <a:gd name="connsiteX3" fmla="*/ 2409568 w 6635579"/>
+              <a:gd name="connsiteY3" fmla="*/ 1161535 h 1172959"/>
+              <a:gd name="connsiteX4" fmla="*/ 3039762 w 6635579"/>
+              <a:gd name="connsiteY4" fmla="*/ 37070 h 1172959"/>
+              <a:gd name="connsiteX5" fmla="*/ 3645244 w 6635579"/>
+              <a:gd name="connsiteY5" fmla="*/ 1161535 h 1172959"/>
+              <a:gd name="connsiteX6" fmla="*/ 4275438 w 6635579"/>
+              <a:gd name="connsiteY6" fmla="*/ 0 h 1172959"/>
+              <a:gd name="connsiteX7" fmla="*/ 4917990 w 6635579"/>
+              <a:gd name="connsiteY7" fmla="*/ 1161535 h 1172959"/>
+              <a:gd name="connsiteX8" fmla="*/ 5263979 w 6635579"/>
+              <a:gd name="connsiteY8" fmla="*/ 593124 h 1172959"/>
+              <a:gd name="connsiteX9" fmla="*/ 6635579 w 6635579"/>
+              <a:gd name="connsiteY9" fmla="*/ 593124 h 1172959"/>
+              <a:gd name="connsiteX10" fmla="*/ 6635579 w 6635579"/>
+              <a:gd name="connsiteY10" fmla="*/ 593124 h 1172959"/>
+              <a:gd name="connsiteX11" fmla="*/ 6635579 w 6635579"/>
+              <a:gd name="connsiteY11" fmla="*/ 593124 h 1172959"/>
+              <a:gd name="connsiteX0" fmla="*/ 0 w 6635579"/>
+              <a:gd name="connsiteY0" fmla="*/ 580768 h 1172959"/>
+              <a:gd name="connsiteX1" fmla="*/ 1470454 w 6635579"/>
+              <a:gd name="connsiteY1" fmla="*/ 580768 h 1172959"/>
+              <a:gd name="connsiteX2" fmla="*/ 1779373 w 6635579"/>
+              <a:gd name="connsiteY2" fmla="*/ 24713 h 1172959"/>
+              <a:gd name="connsiteX3" fmla="*/ 2409568 w 6635579"/>
+              <a:gd name="connsiteY3" fmla="*/ 1161535 h 1172959"/>
+              <a:gd name="connsiteX4" fmla="*/ 3039762 w 6635579"/>
+              <a:gd name="connsiteY4" fmla="*/ 37070 h 1172959"/>
+              <a:gd name="connsiteX5" fmla="*/ 3645244 w 6635579"/>
+              <a:gd name="connsiteY5" fmla="*/ 1161535 h 1172959"/>
+              <a:gd name="connsiteX6" fmla="*/ 4275438 w 6635579"/>
+              <a:gd name="connsiteY6" fmla="*/ 0 h 1172959"/>
+              <a:gd name="connsiteX7" fmla="*/ 4917990 w 6635579"/>
+              <a:gd name="connsiteY7" fmla="*/ 1161535 h 1172959"/>
+              <a:gd name="connsiteX8" fmla="*/ 5263979 w 6635579"/>
+              <a:gd name="connsiteY8" fmla="*/ 593124 h 1172959"/>
+              <a:gd name="connsiteX9" fmla="*/ 6635579 w 6635579"/>
+              <a:gd name="connsiteY9" fmla="*/ 593124 h 1172959"/>
+              <a:gd name="connsiteX10" fmla="*/ 6635579 w 6635579"/>
+              <a:gd name="connsiteY10" fmla="*/ 593124 h 1172959"/>
+              <a:gd name="connsiteX11" fmla="*/ 6635579 w 6635579"/>
+              <a:gd name="connsiteY11" fmla="*/ 593124 h 1172959"/>
+              <a:gd name="connsiteX0" fmla="*/ 0 w 6635579"/>
+              <a:gd name="connsiteY0" fmla="*/ 580768 h 1172959"/>
+              <a:gd name="connsiteX1" fmla="*/ 1470454 w 6635579"/>
+              <a:gd name="connsiteY1" fmla="*/ 580768 h 1172959"/>
+              <a:gd name="connsiteX2" fmla="*/ 1779373 w 6635579"/>
+              <a:gd name="connsiteY2" fmla="*/ 24713 h 1172959"/>
+              <a:gd name="connsiteX3" fmla="*/ 2409568 w 6635579"/>
+              <a:gd name="connsiteY3" fmla="*/ 1161535 h 1172959"/>
+              <a:gd name="connsiteX4" fmla="*/ 3039762 w 6635579"/>
+              <a:gd name="connsiteY4" fmla="*/ 37070 h 1172959"/>
+              <a:gd name="connsiteX5" fmla="*/ 3645244 w 6635579"/>
+              <a:gd name="connsiteY5" fmla="*/ 1161535 h 1172959"/>
+              <a:gd name="connsiteX6" fmla="*/ 4275438 w 6635579"/>
+              <a:gd name="connsiteY6" fmla="*/ 0 h 1172959"/>
+              <a:gd name="connsiteX7" fmla="*/ 4917990 w 6635579"/>
+              <a:gd name="connsiteY7" fmla="*/ 1161535 h 1172959"/>
+              <a:gd name="connsiteX8" fmla="*/ 5263979 w 6635579"/>
+              <a:gd name="connsiteY8" fmla="*/ 593124 h 1172959"/>
+              <a:gd name="connsiteX9" fmla="*/ 6635579 w 6635579"/>
+              <a:gd name="connsiteY9" fmla="*/ 593124 h 1172959"/>
+              <a:gd name="connsiteX10" fmla="*/ 6635579 w 6635579"/>
+              <a:gd name="connsiteY10" fmla="*/ 593124 h 1172959"/>
+              <a:gd name="connsiteX11" fmla="*/ 6635579 w 6635579"/>
+              <a:gd name="connsiteY11" fmla="*/ 593124 h 1172959"/>
+              <a:gd name="connsiteX0" fmla="*/ 0 w 6635579"/>
+              <a:gd name="connsiteY0" fmla="*/ 580768 h 1172959"/>
+              <a:gd name="connsiteX1" fmla="*/ 1470454 w 6635579"/>
+              <a:gd name="connsiteY1" fmla="*/ 580768 h 1172959"/>
+              <a:gd name="connsiteX2" fmla="*/ 1779373 w 6635579"/>
+              <a:gd name="connsiteY2" fmla="*/ 24713 h 1172959"/>
+              <a:gd name="connsiteX3" fmla="*/ 2409568 w 6635579"/>
+              <a:gd name="connsiteY3" fmla="*/ 1161535 h 1172959"/>
+              <a:gd name="connsiteX4" fmla="*/ 3039762 w 6635579"/>
+              <a:gd name="connsiteY4" fmla="*/ 37070 h 1172959"/>
+              <a:gd name="connsiteX5" fmla="*/ 3645244 w 6635579"/>
+              <a:gd name="connsiteY5" fmla="*/ 1161535 h 1172959"/>
+              <a:gd name="connsiteX6" fmla="*/ 4275438 w 6635579"/>
+              <a:gd name="connsiteY6" fmla="*/ 0 h 1172959"/>
+              <a:gd name="connsiteX7" fmla="*/ 4917990 w 6635579"/>
+              <a:gd name="connsiteY7" fmla="*/ 1161535 h 1172959"/>
+              <a:gd name="connsiteX8" fmla="*/ 5263979 w 6635579"/>
+              <a:gd name="connsiteY8" fmla="*/ 593124 h 1172959"/>
+              <a:gd name="connsiteX9" fmla="*/ 6635579 w 6635579"/>
+              <a:gd name="connsiteY9" fmla="*/ 593124 h 1172959"/>
+              <a:gd name="connsiteX10" fmla="*/ 6635579 w 6635579"/>
+              <a:gd name="connsiteY10" fmla="*/ 593124 h 1172959"/>
+              <a:gd name="connsiteX11" fmla="*/ 6635579 w 6635579"/>
+              <a:gd name="connsiteY11" fmla="*/ 593124 h 1172959"/>
+              <a:gd name="connsiteX0" fmla="*/ 0 w 6635579"/>
+              <a:gd name="connsiteY0" fmla="*/ 580768 h 1172959"/>
+              <a:gd name="connsiteX1" fmla="*/ 1470454 w 6635579"/>
+              <a:gd name="connsiteY1" fmla="*/ 580768 h 1172959"/>
+              <a:gd name="connsiteX2" fmla="*/ 1779373 w 6635579"/>
+              <a:gd name="connsiteY2" fmla="*/ 24713 h 1172959"/>
+              <a:gd name="connsiteX3" fmla="*/ 2409568 w 6635579"/>
+              <a:gd name="connsiteY3" fmla="*/ 1161535 h 1172959"/>
+              <a:gd name="connsiteX4" fmla="*/ 3039762 w 6635579"/>
+              <a:gd name="connsiteY4" fmla="*/ 37070 h 1172959"/>
+              <a:gd name="connsiteX5" fmla="*/ 3645244 w 6635579"/>
+              <a:gd name="connsiteY5" fmla="*/ 1161535 h 1172959"/>
+              <a:gd name="connsiteX6" fmla="*/ 4275438 w 6635579"/>
+              <a:gd name="connsiteY6" fmla="*/ 0 h 1172959"/>
+              <a:gd name="connsiteX7" fmla="*/ 4917990 w 6635579"/>
+              <a:gd name="connsiteY7" fmla="*/ 1161535 h 1172959"/>
+              <a:gd name="connsiteX8" fmla="*/ 5263979 w 6635579"/>
+              <a:gd name="connsiteY8" fmla="*/ 593124 h 1172959"/>
+              <a:gd name="connsiteX9" fmla="*/ 6635579 w 6635579"/>
+              <a:gd name="connsiteY9" fmla="*/ 593124 h 1172959"/>
+              <a:gd name="connsiteX10" fmla="*/ 6635579 w 6635579"/>
+              <a:gd name="connsiteY10" fmla="*/ 593124 h 1172959"/>
+              <a:gd name="connsiteX11" fmla="*/ 6635579 w 6635579"/>
+              <a:gd name="connsiteY11" fmla="*/ 593124 h 1172959"/>
+              <a:gd name="connsiteX0" fmla="*/ 0 w 6635579"/>
+              <a:gd name="connsiteY0" fmla="*/ 580768 h 1172959"/>
+              <a:gd name="connsiteX1" fmla="*/ 1470454 w 6635579"/>
+              <a:gd name="connsiteY1" fmla="*/ 580768 h 1172959"/>
+              <a:gd name="connsiteX2" fmla="*/ 1779373 w 6635579"/>
+              <a:gd name="connsiteY2" fmla="*/ 24713 h 1172959"/>
+              <a:gd name="connsiteX3" fmla="*/ 2409568 w 6635579"/>
+              <a:gd name="connsiteY3" fmla="*/ 1161535 h 1172959"/>
+              <a:gd name="connsiteX4" fmla="*/ 3039762 w 6635579"/>
+              <a:gd name="connsiteY4" fmla="*/ 37070 h 1172959"/>
+              <a:gd name="connsiteX5" fmla="*/ 3645244 w 6635579"/>
+              <a:gd name="connsiteY5" fmla="*/ 1161535 h 1172959"/>
+              <a:gd name="connsiteX6" fmla="*/ 4275438 w 6635579"/>
+              <a:gd name="connsiteY6" fmla="*/ 0 h 1172959"/>
+              <a:gd name="connsiteX7" fmla="*/ 4917990 w 6635579"/>
+              <a:gd name="connsiteY7" fmla="*/ 1161535 h 1172959"/>
+              <a:gd name="connsiteX8" fmla="*/ 5263979 w 6635579"/>
+              <a:gd name="connsiteY8" fmla="*/ 593124 h 1172959"/>
+              <a:gd name="connsiteX9" fmla="*/ 6635579 w 6635579"/>
+              <a:gd name="connsiteY9" fmla="*/ 593124 h 1172959"/>
+              <a:gd name="connsiteX10" fmla="*/ 6635579 w 6635579"/>
+              <a:gd name="connsiteY10" fmla="*/ 593124 h 1172959"/>
+              <a:gd name="connsiteX11" fmla="*/ 6635579 w 6635579"/>
+              <a:gd name="connsiteY11" fmla="*/ 593124 h 1172959"/>
+              <a:gd name="connsiteX0" fmla="*/ 0 w 6635579"/>
+              <a:gd name="connsiteY0" fmla="*/ 580768 h 1172959"/>
+              <a:gd name="connsiteX1" fmla="*/ 1470454 w 6635579"/>
+              <a:gd name="connsiteY1" fmla="*/ 580768 h 1172959"/>
+              <a:gd name="connsiteX2" fmla="*/ 1779373 w 6635579"/>
+              <a:gd name="connsiteY2" fmla="*/ 24713 h 1172959"/>
+              <a:gd name="connsiteX3" fmla="*/ 2409568 w 6635579"/>
+              <a:gd name="connsiteY3" fmla="*/ 1161535 h 1172959"/>
+              <a:gd name="connsiteX4" fmla="*/ 3039762 w 6635579"/>
+              <a:gd name="connsiteY4" fmla="*/ 37070 h 1172959"/>
+              <a:gd name="connsiteX5" fmla="*/ 3645244 w 6635579"/>
+              <a:gd name="connsiteY5" fmla="*/ 1161535 h 1172959"/>
+              <a:gd name="connsiteX6" fmla="*/ 4275438 w 6635579"/>
+              <a:gd name="connsiteY6" fmla="*/ 0 h 1172959"/>
+              <a:gd name="connsiteX7" fmla="*/ 4917990 w 6635579"/>
+              <a:gd name="connsiteY7" fmla="*/ 1161535 h 1172959"/>
+              <a:gd name="connsiteX8" fmla="*/ 5263979 w 6635579"/>
+              <a:gd name="connsiteY8" fmla="*/ 593124 h 1172959"/>
+              <a:gd name="connsiteX9" fmla="*/ 6635579 w 6635579"/>
+              <a:gd name="connsiteY9" fmla="*/ 593124 h 1172959"/>
+              <a:gd name="connsiteX10" fmla="*/ 6635579 w 6635579"/>
+              <a:gd name="connsiteY10" fmla="*/ 593124 h 1172959"/>
+              <a:gd name="connsiteX11" fmla="*/ 6635579 w 6635579"/>
+              <a:gd name="connsiteY11" fmla="*/ 593124 h 1172959"/>
+              <a:gd name="connsiteX0" fmla="*/ 0 w 6635579"/>
+              <a:gd name="connsiteY0" fmla="*/ 580768 h 1172959"/>
+              <a:gd name="connsiteX1" fmla="*/ 1470454 w 6635579"/>
+              <a:gd name="connsiteY1" fmla="*/ 580768 h 1172959"/>
+              <a:gd name="connsiteX2" fmla="*/ 1779373 w 6635579"/>
+              <a:gd name="connsiteY2" fmla="*/ 24713 h 1172959"/>
+              <a:gd name="connsiteX3" fmla="*/ 2409568 w 6635579"/>
+              <a:gd name="connsiteY3" fmla="*/ 1161535 h 1172959"/>
+              <a:gd name="connsiteX4" fmla="*/ 3039762 w 6635579"/>
+              <a:gd name="connsiteY4" fmla="*/ 37070 h 1172959"/>
+              <a:gd name="connsiteX5" fmla="*/ 3645244 w 6635579"/>
+              <a:gd name="connsiteY5" fmla="*/ 1161535 h 1172959"/>
+              <a:gd name="connsiteX6" fmla="*/ 4275438 w 6635579"/>
+              <a:gd name="connsiteY6" fmla="*/ 0 h 1172959"/>
+              <a:gd name="connsiteX7" fmla="*/ 4917990 w 6635579"/>
+              <a:gd name="connsiteY7" fmla="*/ 1161535 h 1172959"/>
+              <a:gd name="connsiteX8" fmla="*/ 5263979 w 6635579"/>
+              <a:gd name="connsiteY8" fmla="*/ 593124 h 1172959"/>
+              <a:gd name="connsiteX9" fmla="*/ 6635579 w 6635579"/>
+              <a:gd name="connsiteY9" fmla="*/ 593124 h 1172959"/>
+              <a:gd name="connsiteX10" fmla="*/ 6635579 w 6635579"/>
+              <a:gd name="connsiteY10" fmla="*/ 593124 h 1172959"/>
+              <a:gd name="connsiteX11" fmla="*/ 6635579 w 6635579"/>
+              <a:gd name="connsiteY11" fmla="*/ 593124 h 1172959"/>
+              <a:gd name="connsiteX0" fmla="*/ 0 w 6635579"/>
+              <a:gd name="connsiteY0" fmla="*/ 580768 h 1172959"/>
+              <a:gd name="connsiteX1" fmla="*/ 1470454 w 6635579"/>
+              <a:gd name="connsiteY1" fmla="*/ 580768 h 1172959"/>
+              <a:gd name="connsiteX2" fmla="*/ 1779373 w 6635579"/>
+              <a:gd name="connsiteY2" fmla="*/ 24713 h 1172959"/>
+              <a:gd name="connsiteX3" fmla="*/ 2409568 w 6635579"/>
+              <a:gd name="connsiteY3" fmla="*/ 1161535 h 1172959"/>
+              <a:gd name="connsiteX4" fmla="*/ 3039762 w 6635579"/>
+              <a:gd name="connsiteY4" fmla="*/ 37070 h 1172959"/>
+              <a:gd name="connsiteX5" fmla="*/ 3645244 w 6635579"/>
+              <a:gd name="connsiteY5" fmla="*/ 1161535 h 1172959"/>
+              <a:gd name="connsiteX6" fmla="*/ 4275438 w 6635579"/>
+              <a:gd name="connsiteY6" fmla="*/ 0 h 1172959"/>
+              <a:gd name="connsiteX7" fmla="*/ 4917990 w 6635579"/>
+              <a:gd name="connsiteY7" fmla="*/ 1161535 h 1172959"/>
+              <a:gd name="connsiteX8" fmla="*/ 5263979 w 6635579"/>
+              <a:gd name="connsiteY8" fmla="*/ 593124 h 1172959"/>
+              <a:gd name="connsiteX9" fmla="*/ 6635579 w 6635579"/>
+              <a:gd name="connsiteY9" fmla="*/ 593124 h 1172959"/>
+              <a:gd name="connsiteX10" fmla="*/ 6635579 w 6635579"/>
+              <a:gd name="connsiteY10" fmla="*/ 593124 h 1172959"/>
+              <a:gd name="connsiteX11" fmla="*/ 6635579 w 6635579"/>
+              <a:gd name="connsiteY11" fmla="*/ 593124 h 1172959"/>
+              <a:gd name="connsiteX0" fmla="*/ 0 w 6635579"/>
+              <a:gd name="connsiteY0" fmla="*/ 580768 h 1172959"/>
+              <a:gd name="connsiteX1" fmla="*/ 1470454 w 6635579"/>
+              <a:gd name="connsiteY1" fmla="*/ 580768 h 1172959"/>
+              <a:gd name="connsiteX2" fmla="*/ 1779373 w 6635579"/>
+              <a:gd name="connsiteY2" fmla="*/ 24713 h 1172959"/>
+              <a:gd name="connsiteX3" fmla="*/ 2409568 w 6635579"/>
+              <a:gd name="connsiteY3" fmla="*/ 1161535 h 1172959"/>
+              <a:gd name="connsiteX4" fmla="*/ 3039762 w 6635579"/>
+              <a:gd name="connsiteY4" fmla="*/ 37070 h 1172959"/>
+              <a:gd name="connsiteX5" fmla="*/ 3645244 w 6635579"/>
+              <a:gd name="connsiteY5" fmla="*/ 1161535 h 1172959"/>
+              <a:gd name="connsiteX6" fmla="*/ 4275438 w 6635579"/>
+              <a:gd name="connsiteY6" fmla="*/ 0 h 1172959"/>
+              <a:gd name="connsiteX7" fmla="*/ 4917990 w 6635579"/>
+              <a:gd name="connsiteY7" fmla="*/ 1161535 h 1172959"/>
+              <a:gd name="connsiteX8" fmla="*/ 5263979 w 6635579"/>
+              <a:gd name="connsiteY8" fmla="*/ 593124 h 1172959"/>
+              <a:gd name="connsiteX9" fmla="*/ 6635579 w 6635579"/>
+              <a:gd name="connsiteY9" fmla="*/ 593124 h 1172959"/>
+              <a:gd name="connsiteX10" fmla="*/ 6635579 w 6635579"/>
+              <a:gd name="connsiteY10" fmla="*/ 593124 h 1172959"/>
+              <a:gd name="connsiteX11" fmla="*/ 6635579 w 6635579"/>
+              <a:gd name="connsiteY11" fmla="*/ 593124 h 1172959"/>
+              <a:gd name="connsiteX0" fmla="*/ 0 w 6635579"/>
+              <a:gd name="connsiteY0" fmla="*/ 580768 h 1161535"/>
+              <a:gd name="connsiteX1" fmla="*/ 1470454 w 6635579"/>
+              <a:gd name="connsiteY1" fmla="*/ 580768 h 1161535"/>
+              <a:gd name="connsiteX2" fmla="*/ 1779373 w 6635579"/>
+              <a:gd name="connsiteY2" fmla="*/ 24713 h 1161535"/>
+              <a:gd name="connsiteX3" fmla="*/ 2409568 w 6635579"/>
+              <a:gd name="connsiteY3" fmla="*/ 1161535 h 1161535"/>
+              <a:gd name="connsiteX4" fmla="*/ 3039762 w 6635579"/>
+              <a:gd name="connsiteY4" fmla="*/ 37070 h 1161535"/>
+              <a:gd name="connsiteX5" fmla="*/ 3645244 w 6635579"/>
+              <a:gd name="connsiteY5" fmla="*/ 1161535 h 1161535"/>
+              <a:gd name="connsiteX6" fmla="*/ 4275438 w 6635579"/>
+              <a:gd name="connsiteY6" fmla="*/ 0 h 1161535"/>
+              <a:gd name="connsiteX7" fmla="*/ 4917990 w 6635579"/>
+              <a:gd name="connsiteY7" fmla="*/ 1161535 h 1161535"/>
+              <a:gd name="connsiteX8" fmla="*/ 5263979 w 6635579"/>
+              <a:gd name="connsiteY8" fmla="*/ 593124 h 1161535"/>
+              <a:gd name="connsiteX9" fmla="*/ 6635579 w 6635579"/>
+              <a:gd name="connsiteY9" fmla="*/ 593124 h 1161535"/>
+              <a:gd name="connsiteX10" fmla="*/ 6635579 w 6635579"/>
+              <a:gd name="connsiteY10" fmla="*/ 593124 h 1161535"/>
+              <a:gd name="connsiteX11" fmla="*/ 6635579 w 6635579"/>
+              <a:gd name="connsiteY11" fmla="*/ 593124 h 1161535"/>
+              <a:gd name="connsiteX0" fmla="*/ 0 w 6635579"/>
+              <a:gd name="connsiteY0" fmla="*/ 580768 h 1161535"/>
+              <a:gd name="connsiteX1" fmla="*/ 1470454 w 6635579"/>
+              <a:gd name="connsiteY1" fmla="*/ 580768 h 1161535"/>
+              <a:gd name="connsiteX2" fmla="*/ 1779373 w 6635579"/>
+              <a:gd name="connsiteY2" fmla="*/ 24713 h 1161535"/>
+              <a:gd name="connsiteX3" fmla="*/ 2409568 w 6635579"/>
+              <a:gd name="connsiteY3" fmla="*/ 1161535 h 1161535"/>
+              <a:gd name="connsiteX4" fmla="*/ 3039762 w 6635579"/>
+              <a:gd name="connsiteY4" fmla="*/ 37070 h 1161535"/>
+              <a:gd name="connsiteX5" fmla="*/ 3645244 w 6635579"/>
+              <a:gd name="connsiteY5" fmla="*/ 1161535 h 1161535"/>
+              <a:gd name="connsiteX6" fmla="*/ 4275438 w 6635579"/>
+              <a:gd name="connsiteY6" fmla="*/ 0 h 1161535"/>
+              <a:gd name="connsiteX7" fmla="*/ 4917990 w 6635579"/>
+              <a:gd name="connsiteY7" fmla="*/ 1161535 h 1161535"/>
+              <a:gd name="connsiteX8" fmla="*/ 5263979 w 6635579"/>
+              <a:gd name="connsiteY8" fmla="*/ 593124 h 1161535"/>
+              <a:gd name="connsiteX9" fmla="*/ 6635579 w 6635579"/>
+              <a:gd name="connsiteY9" fmla="*/ 593124 h 1161535"/>
+              <a:gd name="connsiteX10" fmla="*/ 6635579 w 6635579"/>
+              <a:gd name="connsiteY10" fmla="*/ 593124 h 1161535"/>
+              <a:gd name="connsiteX11" fmla="*/ 6635579 w 6635579"/>
+              <a:gd name="connsiteY11" fmla="*/ 593124 h 1161535"/>
+              <a:gd name="connsiteX0" fmla="*/ 0 w 6635579"/>
+              <a:gd name="connsiteY0" fmla="*/ 580768 h 1161535"/>
+              <a:gd name="connsiteX1" fmla="*/ 1470454 w 6635579"/>
+              <a:gd name="connsiteY1" fmla="*/ 580768 h 1161535"/>
+              <a:gd name="connsiteX2" fmla="*/ 1779373 w 6635579"/>
+              <a:gd name="connsiteY2" fmla="*/ 24713 h 1161535"/>
+              <a:gd name="connsiteX3" fmla="*/ 2409568 w 6635579"/>
+              <a:gd name="connsiteY3" fmla="*/ 1161535 h 1161535"/>
+              <a:gd name="connsiteX4" fmla="*/ 3039762 w 6635579"/>
+              <a:gd name="connsiteY4" fmla="*/ 37070 h 1161535"/>
+              <a:gd name="connsiteX5" fmla="*/ 3645244 w 6635579"/>
+              <a:gd name="connsiteY5" fmla="*/ 1161535 h 1161535"/>
+              <a:gd name="connsiteX6" fmla="*/ 4275438 w 6635579"/>
+              <a:gd name="connsiteY6" fmla="*/ 0 h 1161535"/>
+              <a:gd name="connsiteX7" fmla="*/ 4917990 w 6635579"/>
+              <a:gd name="connsiteY7" fmla="*/ 1161535 h 1161535"/>
+              <a:gd name="connsiteX8" fmla="*/ 5263979 w 6635579"/>
+              <a:gd name="connsiteY8" fmla="*/ 593124 h 1161535"/>
+              <a:gd name="connsiteX9" fmla="*/ 6635579 w 6635579"/>
+              <a:gd name="connsiteY9" fmla="*/ 593124 h 1161535"/>
+              <a:gd name="connsiteX10" fmla="*/ 6635579 w 6635579"/>
+              <a:gd name="connsiteY10" fmla="*/ 593124 h 1161535"/>
+              <a:gd name="connsiteX11" fmla="*/ 6635579 w 6635579"/>
+              <a:gd name="connsiteY11" fmla="*/ 593124 h 1161535"/>
+              <a:gd name="connsiteX0" fmla="*/ 0 w 6635579"/>
+              <a:gd name="connsiteY0" fmla="*/ 580768 h 1161535"/>
+              <a:gd name="connsiteX1" fmla="*/ 1470454 w 6635579"/>
+              <a:gd name="connsiteY1" fmla="*/ 580768 h 1161535"/>
+              <a:gd name="connsiteX2" fmla="*/ 1779373 w 6635579"/>
+              <a:gd name="connsiteY2" fmla="*/ 24713 h 1161535"/>
+              <a:gd name="connsiteX3" fmla="*/ 2409568 w 6635579"/>
+              <a:gd name="connsiteY3" fmla="*/ 1161535 h 1161535"/>
+              <a:gd name="connsiteX4" fmla="*/ 3039762 w 6635579"/>
+              <a:gd name="connsiteY4" fmla="*/ 37070 h 1161535"/>
+              <a:gd name="connsiteX5" fmla="*/ 3645244 w 6635579"/>
+              <a:gd name="connsiteY5" fmla="*/ 1161535 h 1161535"/>
+              <a:gd name="connsiteX6" fmla="*/ 4275438 w 6635579"/>
+              <a:gd name="connsiteY6" fmla="*/ 0 h 1161535"/>
+              <a:gd name="connsiteX7" fmla="*/ 4917990 w 6635579"/>
+              <a:gd name="connsiteY7" fmla="*/ 1161535 h 1161535"/>
+              <a:gd name="connsiteX8" fmla="*/ 5263979 w 6635579"/>
+              <a:gd name="connsiteY8" fmla="*/ 593124 h 1161535"/>
+              <a:gd name="connsiteX9" fmla="*/ 6635579 w 6635579"/>
+              <a:gd name="connsiteY9" fmla="*/ 593124 h 1161535"/>
+              <a:gd name="connsiteX10" fmla="*/ 6635579 w 6635579"/>
+              <a:gd name="connsiteY10" fmla="*/ 593124 h 1161535"/>
+              <a:gd name="connsiteX11" fmla="*/ 6635579 w 6635579"/>
+              <a:gd name="connsiteY11" fmla="*/ 593124 h 1161535"/>
+              <a:gd name="connsiteX0" fmla="*/ 0 w 6635579"/>
+              <a:gd name="connsiteY0" fmla="*/ 580768 h 1161535"/>
+              <a:gd name="connsiteX1" fmla="*/ 1470454 w 6635579"/>
+              <a:gd name="connsiteY1" fmla="*/ 580768 h 1161535"/>
+              <a:gd name="connsiteX2" fmla="*/ 1779373 w 6635579"/>
+              <a:gd name="connsiteY2" fmla="*/ 24713 h 1161535"/>
+              <a:gd name="connsiteX3" fmla="*/ 2409568 w 6635579"/>
+              <a:gd name="connsiteY3" fmla="*/ 1161535 h 1161535"/>
+              <a:gd name="connsiteX4" fmla="*/ 3039762 w 6635579"/>
+              <a:gd name="connsiteY4" fmla="*/ 37070 h 1161535"/>
+              <a:gd name="connsiteX5" fmla="*/ 3645244 w 6635579"/>
+              <a:gd name="connsiteY5" fmla="*/ 1161535 h 1161535"/>
+              <a:gd name="connsiteX6" fmla="*/ 4275438 w 6635579"/>
+              <a:gd name="connsiteY6" fmla="*/ 0 h 1161535"/>
+              <a:gd name="connsiteX7" fmla="*/ 4917990 w 6635579"/>
+              <a:gd name="connsiteY7" fmla="*/ 1161535 h 1161535"/>
+              <a:gd name="connsiteX8" fmla="*/ 5263979 w 6635579"/>
+              <a:gd name="connsiteY8" fmla="*/ 593124 h 1161535"/>
+              <a:gd name="connsiteX9" fmla="*/ 6635579 w 6635579"/>
+              <a:gd name="connsiteY9" fmla="*/ 593124 h 1161535"/>
+              <a:gd name="connsiteX10" fmla="*/ 6635579 w 6635579"/>
+              <a:gd name="connsiteY10" fmla="*/ 593124 h 1161535"/>
+              <a:gd name="connsiteX11" fmla="*/ 6635579 w 6635579"/>
+              <a:gd name="connsiteY11" fmla="*/ 593124 h 1161535"/>
+            </a:gdLst>
+            <a:ahLst/>
+            <a:cxnLst>
+              <a:cxn ang="0">
+                <a:pos x="connsiteX0" y="connsiteY0"/>
+              </a:cxn>
+              <a:cxn ang="0">
+                <a:pos x="connsiteX1" y="connsiteY1"/>
+              </a:cxn>
+              <a:cxn ang="0">
+                <a:pos x="connsiteX2" y="connsiteY2"/>
+              </a:cxn>
+              <a:cxn ang="0">
+                <a:pos x="connsiteX3" y="connsiteY3"/>
+              </a:cxn>
+              <a:cxn ang="0">
+                <a:pos x="connsiteX4" y="connsiteY4"/>
+              </a:cxn>
+              <a:cxn ang="0">
+                <a:pos x="connsiteX5" y="connsiteY5"/>
+              </a:cxn>
+              <a:cxn ang="0">
+                <a:pos x="connsiteX6" y="connsiteY6"/>
+              </a:cxn>
+              <a:cxn ang="0">
+                <a:pos x="connsiteX7" y="connsiteY7"/>
+              </a:cxn>
+              <a:cxn ang="0">
+                <a:pos x="connsiteX8" y="connsiteY8"/>
+              </a:cxn>
+              <a:cxn ang="0">
+                <a:pos x="connsiteX9" y="connsiteY9"/>
+              </a:cxn>
+              <a:cxn ang="0">
+                <a:pos x="connsiteX10" y="connsiteY10"/>
+              </a:cxn>
+              <a:cxn ang="0">
+                <a:pos x="connsiteX11" y="connsiteY11"/>
+              </a:cxn>
+            </a:cxnLst>
+            <a:rect l="l" t="t" r="r" b="b"/>
+            <a:pathLst>
+              <a:path w="6635579" h="1161535">
+                <a:moveTo>
+                  <a:pt x="0" y="580768"/>
+                </a:moveTo>
+                <a:cubicBezTo>
+                  <a:pt x="586946" y="627106"/>
+                  <a:pt x="15652" y="589038"/>
+                  <a:pt x="1470454" y="580768"/>
+                </a:cubicBezTo>
+                <a:cubicBezTo>
+                  <a:pt x="1785773" y="19169"/>
+                  <a:pt x="1491556" y="589100"/>
+                  <a:pt x="1779373" y="24713"/>
+                </a:cubicBezTo>
+                <a:cubicBezTo>
+                  <a:pt x="2395437" y="1171895"/>
+                  <a:pt x="1791540" y="34061"/>
+                  <a:pt x="2409568" y="1161535"/>
+                </a:cubicBezTo>
+                <a:cubicBezTo>
+                  <a:pt x="3046353" y="33489"/>
+                  <a:pt x="2425853" y="1176553"/>
+                  <a:pt x="3039762" y="37070"/>
+                </a:cubicBezTo>
+                <a:cubicBezTo>
+                  <a:pt x="3653671" y="1181243"/>
+                  <a:pt x="3045402" y="42297"/>
+                  <a:pt x="3645244" y="1161535"/>
+                </a:cubicBezTo>
+                <a:cubicBezTo>
+                  <a:pt x="4287288" y="-2883"/>
+                  <a:pt x="3655351" y="1172307"/>
+                  <a:pt x="4275438" y="0"/>
+                </a:cubicBezTo>
+                <a:cubicBezTo>
+                  <a:pt x="4909592" y="1158240"/>
+                  <a:pt x="4288999" y="2915"/>
+                  <a:pt x="4917990" y="1161535"/>
+                </a:cubicBezTo>
+                <a:cubicBezTo>
+                  <a:pt x="5251560" y="589829"/>
+                  <a:pt x="4926132" y="1161472"/>
+                  <a:pt x="5263979" y="593124"/>
+                </a:cubicBezTo>
+                <a:lnTo>
+                  <a:pt x="6635579" y="593124"/>
+                </a:lnTo>
+                <a:lnTo>
+                  <a:pt x="6635579" y="593124"/>
+                </a:lnTo>
+                <a:lnTo>
+                  <a:pt x="6635579" y="593124"/>
+                </a:lnTo>
+              </a:path>
+            </a:pathLst>
+          </a:custGeom>
+          <a:noFill/>
+          <a:ln w="76200"/>
+        </p:spPr>
+        <p:style>
+          <a:lnRef idx="2">
+            <a:schemeClr val="accent1">
+              <a:shade val="15000"/>
+            </a:schemeClr>
+          </a:lnRef>
+          <a:fillRef idx="1">
+            <a:schemeClr val="accent1"/>
+          </a:fillRef>
+          <a:effectRef idx="0">
+            <a:schemeClr val="accent1"/>
+          </a:effectRef>
+          <a:fontRef idx="minor">
+            <a:schemeClr val="lt1"/>
+          </a:fontRef>
+        </p:style>
+        <p:txBody>
+          <a:bodyPr rtlCol="0" anchor="ctr"/>
+          <a:lstStyle/>
+          <a:p>
+            <a:pPr algn="ctr"/>
+            <a:endParaRPr lang="en-US"/>
+          </a:p>
+        </p:txBody>
+      </p:sp>
+    </p:spTree>
+    <p:extLst>
+      <p:ext uri="{BB962C8B-B14F-4D97-AF65-F5344CB8AC3E}">
+        <p14:creationId xmlns:p14="http://schemas.microsoft.com/office/powerpoint/2010/main" val="1982588235"/>
+      </p:ext>
+    </p:extLst>
+  </p:cSld>
+  <p:clrMapOvr>
+    <a:masterClrMapping/>
+  </p:clrMapOvr>
+</p:sld>
+</file>
+
+<file path=ppt/slides/slide3.xml><?xml version="1.0" encoding="utf-8"?>
+<p:sld xmlns:a="http://schemas.openxmlformats.org/drawingml/2006/main" xmlns:r="http://schemas.openxmlformats.org/officeDocument/2006/relationships" xmlns:p="http://schemas.openxmlformats.org/presentationml/2006/main">
+  <p:cSld>
+    <p:spTree>
+      <p:nvGrpSpPr>
+        <p:cNvPr id="1" name=""/>
+        <p:cNvGrpSpPr/>
+        <p:nvPr/>
+      </p:nvGrpSpPr>
+      <p:grpSpPr>
+        <a:xfrm>
+          <a:off x="0" y="0"/>
+          <a:ext cx="0" cy="0"/>
+          <a:chOff x="0" y="0"/>
+          <a:chExt cx="0" cy="0"/>
+        </a:xfrm>
+      </p:grpSpPr>
+      <p:sp>
+        <p:nvSpPr>
+          <p:cNvPr id="2" name="Title 1">
+            <a:extLst>
+              <a:ext uri="{FF2B5EF4-FFF2-40B4-BE49-F238E27FC236}">
+                <a16:creationId xmlns:a16="http://schemas.microsoft.com/office/drawing/2014/main" id="{86FCE9BF-38EB-8643-5426-B4D3AFC780B8}"/>
+              </a:ext>
+            </a:extLst>
+          </p:cNvPr>
+          <p:cNvSpPr>
+            <a:spLocks noGrp="1"/>
+          </p:cNvSpPr>
+          <p:nvPr>
+            <p:ph type="title"/>
+          </p:nvPr>
+        </p:nvSpPr>
+        <p:spPr>
+          <a:xfrm>
+            <a:off x="838200" y="365126"/>
+            <a:ext cx="10515600" cy="708686"/>
+          </a:xfrm>
+        </p:spPr>
+        <p:txBody>
+          <a:bodyPr/>
+          <a:lstStyle/>
+          <a:p>
+            <a:endParaRPr lang="en-US" dirty="0"/>
+          </a:p>
+        </p:txBody>
+      </p:sp>
+      <p:sp>
+        <p:nvSpPr>
+          <p:cNvPr id="3" name="Content Placeholder 2">
+            <a:extLst>
+              <a:ext uri="{FF2B5EF4-FFF2-40B4-BE49-F238E27FC236}">
+                <a16:creationId xmlns:a16="http://schemas.microsoft.com/office/drawing/2014/main" id="{67F53059-8405-94AF-75DC-8DF2E26CE1DE}"/>
+              </a:ext>
+            </a:extLst>
+          </p:cNvPr>
+          <p:cNvSpPr>
+            <a:spLocks noGrp="1"/>
+          </p:cNvSpPr>
+          <p:nvPr>
+            <p:ph idx="1"/>
+          </p:nvPr>
+        </p:nvSpPr>
+        <p:spPr>
+          <a:xfrm>
+            <a:off x="838200" y="4740165"/>
+            <a:ext cx="10515600" cy="1436797"/>
+          </a:xfrm>
+        </p:spPr>
+        <p:txBody>
+          <a:bodyPr/>
+          <a:lstStyle/>
+          <a:p>
+            <a:endParaRPr lang="en-US"/>
+          </a:p>
+        </p:txBody>
+      </p:sp>
+      <p:sp>
+        <p:nvSpPr>
+          <p:cNvPr id="4" name="Oval 3">
+            <a:extLst>
+              <a:ext uri="{FF2B5EF4-FFF2-40B4-BE49-F238E27FC236}">
+                <a16:creationId xmlns:a16="http://schemas.microsoft.com/office/drawing/2014/main" id="{60191085-1FD2-47AD-B3D9-813D1E9FCF60}"/>
+              </a:ext>
+            </a:extLst>
+          </p:cNvPr>
+          <p:cNvSpPr/>
+          <p:nvPr/>
+        </p:nvSpPr>
+        <p:spPr>
+          <a:xfrm>
+            <a:off x="1960338" y="2028715"/>
+            <a:ext cx="830317" cy="483476"/>
+          </a:xfrm>
+          <a:prstGeom prst="ellipse">
+            <a:avLst/>
+          </a:prstGeom>
+          <a:solidFill>
+            <a:schemeClr val="bg1">
+              <a:lumMod val="50000"/>
+            </a:schemeClr>
+          </a:solidFill>
+        </p:spPr>
+        <p:style>
+          <a:lnRef idx="2">
+            <a:schemeClr val="accent1">
+              <a:shade val="15000"/>
+            </a:schemeClr>
+          </a:lnRef>
+          <a:fillRef idx="1">
+            <a:schemeClr val="accent1"/>
+          </a:fillRef>
+          <a:effectRef idx="0">
+            <a:schemeClr val="accent1"/>
+          </a:effectRef>
+          <a:fontRef idx="minor">
+            <a:schemeClr val="lt1"/>
+          </a:fontRef>
+        </p:style>
+        <p:txBody>
+          <a:bodyPr rtlCol="0" anchor="ctr"/>
+          <a:lstStyle/>
+          <a:p>
+            <a:pPr algn="ctr"/>
+            <a:endParaRPr lang="en-US"/>
+          </a:p>
+        </p:txBody>
+      </p:sp>
+      <p:sp>
+        <p:nvSpPr>
+          <p:cNvPr id="5" name="Rectangle 4">
+            <a:extLst>
+              <a:ext uri="{FF2B5EF4-FFF2-40B4-BE49-F238E27FC236}">
+                <a16:creationId xmlns:a16="http://schemas.microsoft.com/office/drawing/2014/main" id="{CC9729A0-DA13-F9BC-723C-ABA0552A1F99}"/>
+              </a:ext>
+            </a:extLst>
+          </p:cNvPr>
+          <p:cNvSpPr/>
+          <p:nvPr/>
+        </p:nvSpPr>
+        <p:spPr>
+          <a:xfrm>
+            <a:off x="1960338" y="2333514"/>
+            <a:ext cx="830317" cy="597611"/>
+          </a:xfrm>
+          <a:prstGeom prst="rect">
+            <a:avLst/>
+          </a:prstGeom>
+          <a:solidFill>
+            <a:schemeClr val="bg1">
+              <a:lumMod val="50000"/>
+            </a:schemeClr>
+          </a:solidFill>
+        </p:spPr>
+        <p:style>
+          <a:lnRef idx="2">
+            <a:schemeClr val="accent1">
+              <a:shade val="15000"/>
+            </a:schemeClr>
+          </a:lnRef>
+          <a:fillRef idx="1">
+            <a:schemeClr val="accent1"/>
+          </a:fillRef>
+          <a:effectRef idx="0">
+            <a:schemeClr val="accent1"/>
+          </a:effectRef>
+          <a:fontRef idx="minor">
+            <a:schemeClr val="lt1"/>
+          </a:fontRef>
+        </p:style>
+        <p:txBody>
+          <a:bodyPr rtlCol="0" anchor="ctr"/>
+          <a:lstStyle/>
+          <a:p>
+            <a:pPr algn="ctr"/>
+            <a:endParaRPr lang="en-US">
+              <a:solidFill>
+                <a:schemeClr val="bg1"/>
+              </a:solidFill>
+            </a:endParaRPr>
+          </a:p>
+        </p:txBody>
+      </p:sp>
+      <p:sp>
+        <p:nvSpPr>
+          <p:cNvPr id="6" name="TextBox 5">
+            <a:extLst>
+              <a:ext uri="{FF2B5EF4-FFF2-40B4-BE49-F238E27FC236}">
+                <a16:creationId xmlns:a16="http://schemas.microsoft.com/office/drawing/2014/main" id="{0C0014C3-5261-F1BE-7E64-F5F2B58230E0}"/>
+              </a:ext>
+            </a:extLst>
+          </p:cNvPr>
+          <p:cNvSpPr txBox="1"/>
+          <p:nvPr/>
+        </p:nvSpPr>
+        <p:spPr>
+          <a:xfrm>
+            <a:off x="1927208" y="2463042"/>
+            <a:ext cx="873957" cy="338554"/>
+          </a:xfrm>
+          <a:prstGeom prst="rect">
+            <a:avLst/>
+          </a:prstGeom>
+          <a:noFill/>
+        </p:spPr>
+        <p:txBody>
+          <a:bodyPr wrap="none" rtlCol="0">
+            <a:spAutoFit/>
+          </a:bodyPr>
+          <a:lstStyle/>
+          <a:p>
+            <a:pPr algn="ctr"/>
+            <a:r>
+              <a:rPr lang="en-US" sz="1600" dirty="0">
+                <a:solidFill>
+                  <a:schemeClr val="bg1"/>
+                </a:solidFill>
+              </a:rPr>
+              <a:t>2N2222</a:t>
+            </a:r>
+          </a:p>
+        </p:txBody>
+      </p:sp>
+      <p:cxnSp>
+        <p:nvCxnSpPr>
+          <p:cNvPr id="8" name="Straight Connector 7">
+            <a:extLst>
+              <a:ext uri="{FF2B5EF4-FFF2-40B4-BE49-F238E27FC236}">
+                <a16:creationId xmlns:a16="http://schemas.microsoft.com/office/drawing/2014/main" id="{9BAFA34D-2870-F9CA-5452-351B158A257A}"/>
+              </a:ext>
+            </a:extLst>
+          </p:cNvPr>
+          <p:cNvCxnSpPr/>
+          <p:nvPr/>
+        </p:nvCxnSpPr>
+        <p:spPr>
+          <a:xfrm>
+            <a:off x="2078181" y="2939340"/>
+            <a:ext cx="0" cy="621656"/>
+          </a:xfrm>
+          <a:prstGeom prst="line">
+            <a:avLst/>
+          </a:prstGeom>
+          <a:ln w="38100"/>
+        </p:spPr>
+        <p:style>
+          <a:lnRef idx="2">
+            <a:schemeClr val="accent1"/>
+          </a:lnRef>
+          <a:fillRef idx="0">
+            <a:schemeClr val="accent1"/>
+          </a:fillRef>
+          <a:effectRef idx="1">
+            <a:schemeClr val="accent1"/>
+          </a:effectRef>
+          <a:fontRef idx="minor">
+            <a:schemeClr val="tx1"/>
+          </a:fontRef>
+        </p:style>
+      </p:cxnSp>
+      <p:cxnSp>
+        <p:nvCxnSpPr>
+          <p:cNvPr id="9" name="Straight Connector 8">
+            <a:extLst>
+              <a:ext uri="{FF2B5EF4-FFF2-40B4-BE49-F238E27FC236}">
+                <a16:creationId xmlns:a16="http://schemas.microsoft.com/office/drawing/2014/main" id="{2D9461A8-21AB-CA38-3477-D269AF332297}"/>
+              </a:ext>
+            </a:extLst>
+          </p:cNvPr>
+          <p:cNvCxnSpPr/>
+          <p:nvPr/>
+        </p:nvCxnSpPr>
+        <p:spPr>
+          <a:xfrm>
+            <a:off x="2375496" y="2939340"/>
+            <a:ext cx="0" cy="621656"/>
+          </a:xfrm>
+          <a:prstGeom prst="line">
+            <a:avLst/>
+          </a:prstGeom>
+          <a:ln w="38100"/>
+        </p:spPr>
+        <p:style>
+          <a:lnRef idx="2">
+            <a:schemeClr val="accent1"/>
+          </a:lnRef>
+          <a:fillRef idx="0">
+            <a:schemeClr val="accent1"/>
+          </a:fillRef>
+          <a:effectRef idx="1">
+            <a:schemeClr val="accent1"/>
+          </a:effectRef>
+          <a:fontRef idx="minor">
+            <a:schemeClr val="tx1"/>
+          </a:fontRef>
+        </p:style>
+      </p:cxnSp>
+      <p:cxnSp>
+        <p:nvCxnSpPr>
+          <p:cNvPr id="10" name="Straight Connector 9">
+            <a:extLst>
+              <a:ext uri="{FF2B5EF4-FFF2-40B4-BE49-F238E27FC236}">
+                <a16:creationId xmlns:a16="http://schemas.microsoft.com/office/drawing/2014/main" id="{BEEB7538-527E-ADE1-D668-6BE367414ED5}"/>
+              </a:ext>
+            </a:extLst>
+          </p:cNvPr>
+          <p:cNvCxnSpPr/>
+          <p:nvPr/>
+        </p:nvCxnSpPr>
+        <p:spPr>
+          <a:xfrm>
+            <a:off x="2660072" y="2942549"/>
+            <a:ext cx="0" cy="621656"/>
+          </a:xfrm>
+          <a:prstGeom prst="line">
+            <a:avLst/>
+          </a:prstGeom>
+          <a:ln w="38100"/>
+        </p:spPr>
+        <p:style>
+          <a:lnRef idx="2">
+            <a:schemeClr val="accent1"/>
+          </a:lnRef>
+          <a:fillRef idx="0">
+            <a:schemeClr val="accent1"/>
+          </a:fillRef>
+          <a:effectRef idx="1">
+            <a:schemeClr val="accent1"/>
+          </a:effectRef>
+          <a:fontRef idx="minor">
+            <a:schemeClr val="tx1"/>
+          </a:fontRef>
+        </p:style>
+      </p:cxnSp>
+      <p:sp>
+        <p:nvSpPr>
+          <p:cNvPr id="11" name="TextBox 10">
+            <a:extLst>
+              <a:ext uri="{FF2B5EF4-FFF2-40B4-BE49-F238E27FC236}">
+                <a16:creationId xmlns:a16="http://schemas.microsoft.com/office/drawing/2014/main" id="{7CAFC65A-5A9F-6454-7123-80D9D5AD0962}"/>
+              </a:ext>
+            </a:extLst>
+          </p:cNvPr>
+          <p:cNvSpPr txBox="1"/>
+          <p:nvPr/>
+        </p:nvSpPr>
+        <p:spPr>
+          <a:xfrm>
+            <a:off x="1655184" y="2981602"/>
+            <a:ext cx="304797" cy="369332"/>
+          </a:xfrm>
+          <a:prstGeom prst="rect">
+            <a:avLst/>
+          </a:prstGeom>
+          <a:noFill/>
+        </p:spPr>
+        <p:txBody>
+          <a:bodyPr wrap="square" rtlCol="0">
+            <a:spAutoFit/>
+          </a:bodyPr>
+          <a:lstStyle/>
+          <a:p>
+            <a:r>
+              <a:rPr lang="en-US" dirty="0"/>
+              <a:t>E</a:t>
+            </a:r>
+          </a:p>
+        </p:txBody>
+      </p:sp>
+      <p:sp>
+        <p:nvSpPr>
+          <p:cNvPr id="12" name="TextBox 11">
+            <a:extLst>
+              <a:ext uri="{FF2B5EF4-FFF2-40B4-BE49-F238E27FC236}">
+                <a16:creationId xmlns:a16="http://schemas.microsoft.com/office/drawing/2014/main" id="{E3D89C38-76BC-78E7-EE2F-CE45A0E6CFCA}"/>
+              </a:ext>
+            </a:extLst>
+          </p:cNvPr>
+          <p:cNvSpPr txBox="1"/>
+          <p:nvPr/>
+        </p:nvSpPr>
+        <p:spPr>
+          <a:xfrm>
+            <a:off x="2726714" y="2974654"/>
+            <a:ext cx="304797" cy="369332"/>
+          </a:xfrm>
+          <a:prstGeom prst="rect">
+            <a:avLst/>
+          </a:prstGeom>
+          <a:noFill/>
+        </p:spPr>
+        <p:txBody>
+          <a:bodyPr wrap="square" rtlCol="0">
+            <a:spAutoFit/>
+          </a:bodyPr>
+          <a:lstStyle/>
+          <a:p>
+            <a:r>
+              <a:rPr lang="en-US" dirty="0"/>
+              <a:t>C</a:t>
+            </a:r>
+          </a:p>
+        </p:txBody>
+      </p:sp>
+      <p:pic>
+        <p:nvPicPr>
+          <p:cNvPr id="1026" name="Picture 2">
+            <a:extLst>
+              <a:ext uri="{FF2B5EF4-FFF2-40B4-BE49-F238E27FC236}">
+                <a16:creationId xmlns:a16="http://schemas.microsoft.com/office/drawing/2014/main" id="{D0C6C8AB-1982-55FD-D3F2-7AA8CA52E10E}"/>
+              </a:ext>
+            </a:extLst>
+          </p:cNvPr>
+          <p:cNvPicPr>
+            <a:picLocks noChangeAspect="1" noChangeArrowheads="1"/>
+          </p:cNvPicPr>
+          <p:nvPr/>
+        </p:nvPicPr>
+        <p:blipFill>
+          <a:blip r:embed="rId2">
+            <a:extLst>
+              <a:ext uri="{28A0092B-C50C-407E-A947-70E740481C1C}">
+                <a14:useLocalDpi xmlns:a14="http://schemas.microsoft.com/office/drawing/2010/main" val="0"/>
+              </a:ext>
+            </a:extLst>
+          </a:blip>
+          <a:srcRect/>
+          <a:stretch>
+            <a:fillRect/>
+          </a:stretch>
+        </p:blipFill>
+        <p:spPr bwMode="auto">
+          <a:xfrm>
+            <a:off x="5759278" y="3264585"/>
+            <a:ext cx="6432721" cy="3140977"/>
+          </a:xfrm>
+          <a:prstGeom prst="rect">
+            <a:avLst/>
+          </a:prstGeom>
+          <a:noFill/>
+          <a:extLst>
+            <a:ext uri="{909E8E84-426E-40DD-AFC4-6F175D3DCCD1}">
+              <a14:hiddenFill xmlns:a14="http://schemas.microsoft.com/office/drawing/2010/main">
+                <a:solidFill>
+                  <a:srgbClr val="FFFFFF"/>
+                </a:solidFill>
+              </a14:hiddenFill>
+            </a:ext>
+          </a:extLst>
+        </p:spPr>
+      </p:pic>
+      <p:sp>
+        <p:nvSpPr>
+          <p:cNvPr id="13" name="TextBox 12">
+            <a:extLst>
+              <a:ext uri="{FF2B5EF4-FFF2-40B4-BE49-F238E27FC236}">
+                <a16:creationId xmlns:a16="http://schemas.microsoft.com/office/drawing/2014/main" id="{F05E65A2-E50A-5CC6-C2D5-FF5565BD2A52}"/>
+              </a:ext>
+            </a:extLst>
+          </p:cNvPr>
+          <p:cNvSpPr txBox="1"/>
+          <p:nvPr/>
+        </p:nvSpPr>
+        <p:spPr>
+          <a:xfrm>
+            <a:off x="2223097" y="3621164"/>
+            <a:ext cx="304797" cy="369332"/>
+          </a:xfrm>
+          <a:prstGeom prst="rect">
+            <a:avLst/>
+          </a:prstGeom>
+          <a:noFill/>
+        </p:spPr>
+        <p:txBody>
+          <a:bodyPr wrap="square" rtlCol="0">
+            <a:spAutoFit/>
+          </a:bodyPr>
+          <a:lstStyle/>
+          <a:p>
+            <a:r>
+              <a:rPr lang="en-US" dirty="0"/>
+              <a:t>B</a:t>
+            </a:r>
+          </a:p>
+        </p:txBody>
+      </p:sp>
+      <p:sp>
+        <p:nvSpPr>
+          <p:cNvPr id="14" name="Oval 13">
+            <a:extLst>
+              <a:ext uri="{FF2B5EF4-FFF2-40B4-BE49-F238E27FC236}">
+                <a16:creationId xmlns:a16="http://schemas.microsoft.com/office/drawing/2014/main" id="{61DC12B1-105C-5CF3-BFF6-D9C9CF569E5C}"/>
+              </a:ext>
+            </a:extLst>
+          </p:cNvPr>
+          <p:cNvSpPr/>
+          <p:nvPr/>
+        </p:nvSpPr>
+        <p:spPr>
+          <a:xfrm>
+            <a:off x="4821382" y="2152073"/>
+            <a:ext cx="1111977" cy="1112512"/>
+          </a:xfrm>
+          <a:prstGeom prst="ellipse">
+            <a:avLst/>
+          </a:prstGeom>
+          <a:solidFill>
+            <a:schemeClr val="bg1"/>
+          </a:solidFill>
+          <a:ln w="28575"/>
+        </p:spPr>
+        <p:style>
+          <a:lnRef idx="2">
+            <a:schemeClr val="accent1">
+              <a:shade val="15000"/>
+            </a:schemeClr>
+          </a:lnRef>
+          <a:fillRef idx="1">
+            <a:schemeClr val="accent1"/>
+          </a:fillRef>
+          <a:effectRef idx="0">
+            <a:schemeClr val="accent1"/>
+          </a:effectRef>
+          <a:fontRef idx="minor">
+            <a:schemeClr val="lt1"/>
+          </a:fontRef>
+        </p:style>
+        <p:txBody>
+          <a:bodyPr rtlCol="0" anchor="ctr"/>
+          <a:lstStyle/>
+          <a:p>
+            <a:pPr algn="ctr"/>
+            <a:endParaRPr lang="en-US"/>
+          </a:p>
+        </p:txBody>
+      </p:sp>
+      <p:cxnSp>
+        <p:nvCxnSpPr>
+          <p:cNvPr id="16" name="Straight Connector 15">
+            <a:extLst>
+              <a:ext uri="{FF2B5EF4-FFF2-40B4-BE49-F238E27FC236}">
+                <a16:creationId xmlns:a16="http://schemas.microsoft.com/office/drawing/2014/main" id="{91E0BA79-1296-946B-E458-59DBBC6F3DC9}"/>
+              </a:ext>
+            </a:extLst>
+          </p:cNvPr>
+          <p:cNvCxnSpPr>
+            <a:cxnSpLocks/>
+          </p:cNvCxnSpPr>
+          <p:nvPr/>
+        </p:nvCxnSpPr>
+        <p:spPr>
+          <a:xfrm>
+            <a:off x="5051728" y="2357777"/>
+            <a:ext cx="10510" cy="712670"/>
+          </a:xfrm>
+          <a:prstGeom prst="line">
+            <a:avLst/>
+          </a:prstGeom>
+          <a:ln w="38100">
+            <a:solidFill>
+              <a:schemeClr val="tx1"/>
+            </a:solidFill>
+          </a:ln>
+        </p:spPr>
+        <p:style>
+          <a:lnRef idx="2">
+            <a:schemeClr val="accent1"/>
+          </a:lnRef>
+          <a:fillRef idx="0">
+            <a:schemeClr val="accent1"/>
+          </a:fillRef>
+          <a:effectRef idx="1">
+            <a:schemeClr val="accent1"/>
+          </a:effectRef>
+          <a:fontRef idx="minor">
+            <a:schemeClr val="tx1"/>
+          </a:fontRef>
+        </p:style>
+      </p:cxnSp>
+      <p:cxnSp>
+        <p:nvCxnSpPr>
+          <p:cNvPr id="19" name="Straight Connector 18">
+            <a:extLst>
+              <a:ext uri="{FF2B5EF4-FFF2-40B4-BE49-F238E27FC236}">
+                <a16:creationId xmlns:a16="http://schemas.microsoft.com/office/drawing/2014/main" id="{3595959D-49BB-D660-C991-A396EEAEFF9D}"/>
+              </a:ext>
+            </a:extLst>
+          </p:cNvPr>
+          <p:cNvCxnSpPr>
+            <a:cxnSpLocks/>
+          </p:cNvCxnSpPr>
+          <p:nvPr/>
+        </p:nvCxnSpPr>
+        <p:spPr>
+          <a:xfrm>
+            <a:off x="4390139" y="2708329"/>
+            <a:ext cx="672099" cy="0"/>
+          </a:xfrm>
+          <a:prstGeom prst="line">
+            <a:avLst/>
+          </a:prstGeom>
+          <a:ln w="38100">
+            <a:solidFill>
+              <a:schemeClr val="tx1"/>
+            </a:solidFill>
+          </a:ln>
+        </p:spPr>
+        <p:style>
+          <a:lnRef idx="2">
+            <a:schemeClr val="accent1"/>
+          </a:lnRef>
+          <a:fillRef idx="0">
+            <a:schemeClr val="accent1"/>
+          </a:fillRef>
+          <a:effectRef idx="1">
+            <a:schemeClr val="accent1"/>
+          </a:effectRef>
+          <a:fontRef idx="minor">
+            <a:schemeClr val="tx1"/>
+          </a:fontRef>
+        </p:style>
+      </p:cxnSp>
+      <p:cxnSp>
+        <p:nvCxnSpPr>
+          <p:cNvPr id="22" name="Straight Connector 21">
+            <a:extLst>
+              <a:ext uri="{FF2B5EF4-FFF2-40B4-BE49-F238E27FC236}">
+                <a16:creationId xmlns:a16="http://schemas.microsoft.com/office/drawing/2014/main" id="{1714EF7D-CE58-FE39-58D3-5260D219B8B6}"/>
+              </a:ext>
+            </a:extLst>
+          </p:cNvPr>
+          <p:cNvCxnSpPr>
+            <a:cxnSpLocks/>
+          </p:cNvCxnSpPr>
+          <p:nvPr/>
+        </p:nvCxnSpPr>
+        <p:spPr>
+          <a:xfrm flipV="1">
+            <a:off x="5041320" y="2028715"/>
+            <a:ext cx="717958" cy="686307"/>
+          </a:xfrm>
+          <a:prstGeom prst="line">
+            <a:avLst/>
+          </a:prstGeom>
+          <a:ln w="38100">
+            <a:solidFill>
+              <a:schemeClr val="tx1"/>
+            </a:solidFill>
+          </a:ln>
+        </p:spPr>
+        <p:style>
+          <a:lnRef idx="2">
+            <a:schemeClr val="accent1"/>
+          </a:lnRef>
+          <a:fillRef idx="0">
+            <a:schemeClr val="accent1"/>
+          </a:fillRef>
+          <a:effectRef idx="1">
+            <a:schemeClr val="accent1"/>
+          </a:effectRef>
+          <a:fontRef idx="minor">
+            <a:schemeClr val="tx1"/>
+          </a:fontRef>
+        </p:style>
+      </p:cxnSp>
+      <p:cxnSp>
+        <p:nvCxnSpPr>
+          <p:cNvPr id="24" name="Straight Connector 23">
+            <a:extLst>
+              <a:ext uri="{FF2B5EF4-FFF2-40B4-BE49-F238E27FC236}">
+                <a16:creationId xmlns:a16="http://schemas.microsoft.com/office/drawing/2014/main" id="{56D33335-EF87-2F79-D396-49337E98E0C0}"/>
+              </a:ext>
+            </a:extLst>
+          </p:cNvPr>
+          <p:cNvCxnSpPr>
+            <a:cxnSpLocks/>
+          </p:cNvCxnSpPr>
+          <p:nvPr/>
+        </p:nvCxnSpPr>
+        <p:spPr>
+          <a:xfrm>
+            <a:off x="5062831" y="2719338"/>
+            <a:ext cx="729180" cy="625070"/>
+          </a:xfrm>
+          <a:prstGeom prst="line">
+            <a:avLst/>
+          </a:prstGeom>
+          <a:ln w="38100">
+            <a:solidFill>
+              <a:schemeClr val="tx1"/>
+            </a:solidFill>
+          </a:ln>
+        </p:spPr>
+        <p:style>
+          <a:lnRef idx="2">
+            <a:schemeClr val="accent1"/>
+          </a:lnRef>
+          <a:fillRef idx="0">
+            <a:schemeClr val="accent1"/>
+          </a:fillRef>
+          <a:effectRef idx="1">
+            <a:schemeClr val="accent1"/>
+          </a:effectRef>
+          <a:fontRef idx="minor">
+            <a:schemeClr val="tx1"/>
+          </a:fontRef>
+        </p:style>
+      </p:cxnSp>
+      <p:cxnSp>
+        <p:nvCxnSpPr>
+          <p:cNvPr id="27" name="Straight Arrow Connector 26">
+            <a:extLst>
+              <a:ext uri="{FF2B5EF4-FFF2-40B4-BE49-F238E27FC236}">
+                <a16:creationId xmlns:a16="http://schemas.microsoft.com/office/drawing/2014/main" id="{CB70ADB7-883C-7055-2710-F59D5B4D5DE7}"/>
+              </a:ext>
+            </a:extLst>
+          </p:cNvPr>
+          <p:cNvCxnSpPr/>
+          <p:nvPr/>
+        </p:nvCxnSpPr>
+        <p:spPr>
+          <a:xfrm>
+            <a:off x="5062238" y="2715022"/>
+            <a:ext cx="534998" cy="451246"/>
+          </a:xfrm>
+          <a:prstGeom prst="straightConnector1">
+            <a:avLst/>
+          </a:prstGeom>
+          <a:ln w="57150">
+            <a:solidFill>
+              <a:schemeClr val="tx1"/>
+            </a:solidFill>
+            <a:tailEnd type="triangle"/>
+          </a:ln>
+        </p:spPr>
+        <p:style>
+          <a:lnRef idx="2">
+            <a:schemeClr val="accent1"/>
+          </a:lnRef>
+          <a:fillRef idx="0">
+            <a:schemeClr val="accent1"/>
+          </a:fillRef>
+          <a:effectRef idx="1">
+            <a:schemeClr val="accent1"/>
+          </a:effectRef>
+          <a:fontRef idx="minor">
+            <a:schemeClr val="tx1"/>
+          </a:fontRef>
+        </p:style>
+      </p:cxnSp>
+      <p:sp>
+        <p:nvSpPr>
+          <p:cNvPr id="28" name="TextBox 27">
+            <a:extLst>
+              <a:ext uri="{FF2B5EF4-FFF2-40B4-BE49-F238E27FC236}">
+                <a16:creationId xmlns:a16="http://schemas.microsoft.com/office/drawing/2014/main" id="{15DB751B-8A67-D179-D3B5-51ABF507B0A8}"/>
+              </a:ext>
+            </a:extLst>
+          </p:cNvPr>
+          <p:cNvSpPr txBox="1"/>
+          <p:nvPr/>
+        </p:nvSpPr>
+        <p:spPr>
+          <a:xfrm>
+            <a:off x="4093238" y="2589649"/>
+            <a:ext cx="304797" cy="276999"/>
+          </a:xfrm>
+          <a:prstGeom prst="rect">
+            <a:avLst/>
+          </a:prstGeom>
+          <a:noFill/>
+        </p:spPr>
+        <p:txBody>
+          <a:bodyPr wrap="square" lIns="0" tIns="0" rIns="0" bIns="0" rtlCol="0">
+            <a:spAutoFit/>
+          </a:bodyPr>
+          <a:lstStyle/>
+          <a:p>
+            <a:pPr algn="ctr"/>
+            <a:r>
+              <a:rPr lang="en-US" dirty="0"/>
+              <a:t>B</a:t>
+            </a:r>
+          </a:p>
+        </p:txBody>
+      </p:sp>
+      <p:sp>
+        <p:nvSpPr>
+          <p:cNvPr id="29" name="TextBox 28">
+            <a:extLst>
+              <a:ext uri="{FF2B5EF4-FFF2-40B4-BE49-F238E27FC236}">
+                <a16:creationId xmlns:a16="http://schemas.microsoft.com/office/drawing/2014/main" id="{F6C1827E-C85B-5CDC-DAA2-3EC5EDCD6EDC}"/>
+              </a:ext>
+            </a:extLst>
+          </p:cNvPr>
+          <p:cNvSpPr txBox="1"/>
+          <p:nvPr/>
+        </p:nvSpPr>
+        <p:spPr>
+          <a:xfrm>
+            <a:off x="5444837" y="3373980"/>
+            <a:ext cx="304797" cy="276999"/>
+          </a:xfrm>
+          <a:prstGeom prst="rect">
+            <a:avLst/>
+          </a:prstGeom>
+          <a:noFill/>
+        </p:spPr>
+        <p:txBody>
+          <a:bodyPr wrap="square" lIns="0" tIns="0" rIns="0" bIns="0" rtlCol="0">
+            <a:spAutoFit/>
+          </a:bodyPr>
+          <a:lstStyle/>
+          <a:p>
+            <a:pPr algn="ctr"/>
+            <a:r>
+              <a:rPr lang="en-US" dirty="0"/>
+              <a:t>E</a:t>
+            </a:r>
+          </a:p>
+        </p:txBody>
+      </p:sp>
+      <p:sp>
+        <p:nvSpPr>
+          <p:cNvPr id="30" name="TextBox 29">
+            <a:extLst>
+              <a:ext uri="{FF2B5EF4-FFF2-40B4-BE49-F238E27FC236}">
+                <a16:creationId xmlns:a16="http://schemas.microsoft.com/office/drawing/2014/main" id="{DA5A2713-9CEC-F63E-C31B-3E60A6E4BC48}"/>
+              </a:ext>
+            </a:extLst>
+          </p:cNvPr>
+          <p:cNvSpPr txBox="1"/>
+          <p:nvPr/>
+        </p:nvSpPr>
+        <p:spPr>
+          <a:xfrm>
+            <a:off x="5535749" y="1722144"/>
+            <a:ext cx="45719" cy="276999"/>
+          </a:xfrm>
+          <a:prstGeom prst="rect">
+            <a:avLst/>
+          </a:prstGeom>
+          <a:noFill/>
+        </p:spPr>
+        <p:txBody>
+          <a:bodyPr wrap="square" lIns="0" tIns="0" rIns="0" bIns="0" rtlCol="0">
+            <a:spAutoFit/>
+          </a:bodyPr>
+          <a:lstStyle/>
+          <a:p>
+            <a:pPr algn="ctr"/>
+            <a:r>
+              <a:rPr lang="en-US" dirty="0"/>
+              <a:t>C</a:t>
+            </a:r>
+          </a:p>
+        </p:txBody>
+      </p:sp>
+      <p:cxnSp>
+        <p:nvCxnSpPr>
+          <p:cNvPr id="31" name="Straight Connector 30">
+            <a:extLst>
+              <a:ext uri="{FF2B5EF4-FFF2-40B4-BE49-F238E27FC236}">
+                <a16:creationId xmlns:a16="http://schemas.microsoft.com/office/drawing/2014/main" id="{3F0530BF-FE7C-7E09-8422-DC19A0FF84BF}"/>
+              </a:ext>
+            </a:extLst>
+          </p:cNvPr>
+          <p:cNvCxnSpPr>
+            <a:cxnSpLocks/>
+          </p:cNvCxnSpPr>
+          <p:nvPr/>
+        </p:nvCxnSpPr>
+        <p:spPr>
+          <a:xfrm>
+            <a:off x="5759278" y="1741830"/>
+            <a:ext cx="0" cy="314578"/>
+          </a:xfrm>
+          <a:prstGeom prst="line">
+            <a:avLst/>
+          </a:prstGeom>
+          <a:ln w="38100">
+            <a:solidFill>
+              <a:schemeClr val="tx1"/>
+            </a:solidFill>
+          </a:ln>
+        </p:spPr>
+        <p:style>
+          <a:lnRef idx="2">
+            <a:schemeClr val="accent1"/>
+          </a:lnRef>
+          <a:fillRef idx="0">
+            <a:schemeClr val="accent1"/>
+          </a:fillRef>
+          <a:effectRef idx="1">
+            <a:schemeClr val="accent1"/>
+          </a:effectRef>
+          <a:fontRef idx="minor">
+            <a:schemeClr val="tx1"/>
+          </a:fontRef>
+        </p:style>
+      </p:cxnSp>
+      <p:cxnSp>
+        <p:nvCxnSpPr>
+          <p:cNvPr id="35" name="Straight Connector 34">
+            <a:extLst>
+              <a:ext uri="{FF2B5EF4-FFF2-40B4-BE49-F238E27FC236}">
+                <a16:creationId xmlns:a16="http://schemas.microsoft.com/office/drawing/2014/main" id="{707CB258-5F87-364C-FD58-3A2510E72808}"/>
+              </a:ext>
+            </a:extLst>
+          </p:cNvPr>
+          <p:cNvCxnSpPr>
+            <a:cxnSpLocks/>
+          </p:cNvCxnSpPr>
+          <p:nvPr/>
+        </p:nvCxnSpPr>
+        <p:spPr>
+          <a:xfrm>
+            <a:off x="5792011" y="3336401"/>
+            <a:ext cx="0" cy="314578"/>
+          </a:xfrm>
+          <a:prstGeom prst="line">
+            <a:avLst/>
+          </a:prstGeom>
+          <a:ln w="38100">
+            <a:solidFill>
+              <a:schemeClr val="tx1"/>
+            </a:solidFill>
+          </a:ln>
+        </p:spPr>
+        <p:style>
+          <a:lnRef idx="2">
+            <a:schemeClr val="accent1"/>
+          </a:lnRef>
+          <a:fillRef idx="0">
+            <a:schemeClr val="accent1"/>
+          </a:fillRef>
+          <a:effectRef idx="1">
+            <a:schemeClr val="accent1"/>
+          </a:effectRef>
+          <a:fontRef idx="minor">
+            <a:schemeClr val="tx1"/>
+          </a:fontRef>
+        </p:style>
+      </p:cxnSp>
+    </p:spTree>
+    <p:extLst>
+      <p:ext uri="{BB962C8B-B14F-4D97-AF65-F5344CB8AC3E}">
+        <p14:creationId xmlns:p14="http://schemas.microsoft.com/office/powerpoint/2010/main" val="3589533400"/>
+      </p:ext>
+    </p:extLst>
+  </p:cSld>
+  <p:clrMapOvr>
+    <a:masterClrMapping/>
+  </p:clrMapOvr>
+</p:sld>
+</file>
+
+<file path=ppt/slides/slide4.xml><?xml version="1.0" encoding="utf-8"?>
+<p:sld xmlns:a="http://schemas.openxmlformats.org/drawingml/2006/main" xmlns:r="http://schemas.openxmlformats.org/officeDocument/2006/relationships" xmlns:p="http://schemas.openxmlformats.org/presentationml/2006/main">
+  <p:cSld>
+    <p:spTree>
+      <p:nvGrpSpPr>
+        <p:cNvPr id="1" name=""/>
+        <p:cNvGrpSpPr/>
+        <p:nvPr/>
+      </p:nvGrpSpPr>
+      <p:grpSpPr>
+        <a:xfrm>
+          <a:off x="0" y="0"/>
+          <a:ext cx="0" cy="0"/>
+          <a:chOff x="0" y="0"/>
+          <a:chExt cx="0" cy="0"/>
+        </a:xfrm>
+      </p:grpSpPr>
+      <p:sp>
+        <p:nvSpPr>
+          <p:cNvPr id="2" name="Title 1">
+            <a:extLst>
+              <a:ext uri="{FF2B5EF4-FFF2-40B4-BE49-F238E27FC236}">
+                <a16:creationId xmlns:a16="http://schemas.microsoft.com/office/drawing/2014/main" id="{A7A49F47-50D7-6F8F-A388-5EFA49DAE85E}"/>
+              </a:ext>
+            </a:extLst>
+          </p:cNvPr>
+          <p:cNvSpPr>
+            <a:spLocks noGrp="1"/>
+          </p:cNvSpPr>
+          <p:nvPr>
+            <p:ph type="title"/>
+          </p:nvPr>
+        </p:nvSpPr>
+        <p:spPr/>
+        <p:txBody>
+          <a:bodyPr/>
+          <a:lstStyle/>
+          <a:p>
+            <a:endParaRPr lang="en-US"/>
+          </a:p>
+        </p:txBody>
+      </p:sp>
+      <p:sp>
+        <p:nvSpPr>
+          <p:cNvPr id="3" name="Content Placeholder 2">
+            <a:extLst>
+              <a:ext uri="{FF2B5EF4-FFF2-40B4-BE49-F238E27FC236}">
+                <a16:creationId xmlns:a16="http://schemas.microsoft.com/office/drawing/2014/main" id="{9600BD76-F755-DD3E-9D62-3945ECEE19D1}"/>
+              </a:ext>
+            </a:extLst>
+          </p:cNvPr>
+          <p:cNvSpPr>
+            <a:spLocks noGrp="1"/>
+          </p:cNvSpPr>
+          <p:nvPr>
+            <p:ph idx="1"/>
+          </p:nvPr>
+        </p:nvSpPr>
+        <p:spPr>
+          <a:xfrm>
+            <a:off x="838200" y="4944979"/>
+            <a:ext cx="10515600" cy="1231984"/>
+          </a:xfrm>
+        </p:spPr>
+        <p:txBody>
+          <a:bodyPr/>
+          <a:lstStyle/>
+          <a:p>
+            <a:endParaRPr lang="en-US" dirty="0"/>
+          </a:p>
+        </p:txBody>
+      </p:sp>
+      <p:grpSp>
+        <p:nvGrpSpPr>
+          <p:cNvPr id="31" name="Group 30">
+            <a:extLst>
+              <a:ext uri="{FF2B5EF4-FFF2-40B4-BE49-F238E27FC236}">
+                <a16:creationId xmlns:a16="http://schemas.microsoft.com/office/drawing/2014/main" id="{54DF600A-5EBF-66EE-8843-302A2887C694}"/>
+              </a:ext>
+            </a:extLst>
+          </p:cNvPr>
+          <p:cNvGrpSpPr/>
+          <p:nvPr/>
+        </p:nvGrpSpPr>
+        <p:grpSpPr>
+          <a:xfrm>
+            <a:off x="1346066" y="2081158"/>
+            <a:ext cx="1318878" cy="1929334"/>
+            <a:chOff x="1346066" y="2081158"/>
+            <a:chExt cx="1318878" cy="1929334"/>
+          </a:xfrm>
+        </p:grpSpPr>
+        <p:sp>
+          <p:nvSpPr>
+            <p:cNvPr id="4" name="Oval 3">
+              <a:extLst>
+                <a:ext uri="{FF2B5EF4-FFF2-40B4-BE49-F238E27FC236}">
+                  <a16:creationId xmlns:a16="http://schemas.microsoft.com/office/drawing/2014/main" id="{2C4B5843-2FF6-F368-1630-EE15F85F70F9}"/>
+                </a:ext>
+              </a:extLst>
+            </p:cNvPr>
+            <p:cNvSpPr/>
+            <p:nvPr/>
+          </p:nvSpPr>
+          <p:spPr>
+            <a:xfrm>
+              <a:off x="1596965" y="2081158"/>
+              <a:ext cx="830317" cy="483476"/>
+            </a:xfrm>
+            <a:prstGeom prst="ellipse">
+              <a:avLst/>
+            </a:prstGeom>
+            <a:solidFill>
+              <a:schemeClr val="tx1">
+                <a:lumMod val="75000"/>
+                <a:lumOff val="25000"/>
+              </a:schemeClr>
+            </a:solidFill>
+          </p:spPr>
+          <p:style>
+            <a:lnRef idx="2">
+              <a:schemeClr val="accent1">
+                <a:shade val="15000"/>
+              </a:schemeClr>
+            </a:lnRef>
+            <a:fillRef idx="1">
+              <a:schemeClr val="accent1"/>
+            </a:fillRef>
+            <a:effectRef idx="0">
+              <a:schemeClr val="accent1"/>
+            </a:effectRef>
+            <a:fontRef idx="minor">
+              <a:schemeClr val="lt1"/>
+            </a:fontRef>
+          </p:style>
+          <p:txBody>
+            <a:bodyPr rtlCol="0" anchor="ctr"/>
+            <a:lstStyle/>
+            <a:p>
+              <a:pPr algn="ctr"/>
+              <a:endParaRPr lang="en-US"/>
+            </a:p>
+          </p:txBody>
+        </p:sp>
+        <p:sp>
+          <p:nvSpPr>
+            <p:cNvPr id="5" name="Rectangle 4">
+              <a:extLst>
+                <a:ext uri="{FF2B5EF4-FFF2-40B4-BE49-F238E27FC236}">
+                  <a16:creationId xmlns:a16="http://schemas.microsoft.com/office/drawing/2014/main" id="{9C449031-69F7-2275-93F9-190773787B43}"/>
+                </a:ext>
+              </a:extLst>
+            </p:cNvPr>
+            <p:cNvSpPr/>
+            <p:nvPr/>
+          </p:nvSpPr>
+          <p:spPr>
+            <a:xfrm>
+              <a:off x="1593771" y="2353510"/>
+              <a:ext cx="830317" cy="597611"/>
+            </a:xfrm>
+            <a:prstGeom prst="rect">
+              <a:avLst/>
+            </a:prstGeom>
+            <a:solidFill>
+              <a:schemeClr val="tx1">
+                <a:lumMod val="75000"/>
+                <a:lumOff val="25000"/>
+              </a:schemeClr>
+            </a:solidFill>
+          </p:spPr>
+          <p:style>
+            <a:lnRef idx="2">
+              <a:schemeClr val="accent1">
+                <a:shade val="15000"/>
+              </a:schemeClr>
+            </a:lnRef>
+            <a:fillRef idx="1">
+              <a:schemeClr val="accent1"/>
+            </a:fillRef>
+            <a:effectRef idx="0">
+              <a:schemeClr val="accent1"/>
+            </a:effectRef>
+            <a:fontRef idx="minor">
+              <a:schemeClr val="lt1"/>
+            </a:fontRef>
+          </p:style>
+          <p:txBody>
+            <a:bodyPr rtlCol="0" anchor="ctr"/>
+            <a:lstStyle/>
+            <a:p>
+              <a:pPr algn="ctr"/>
+              <a:endParaRPr lang="en-US">
+                <a:solidFill>
+                  <a:schemeClr val="bg1"/>
+                </a:solidFill>
+              </a:endParaRPr>
+            </a:p>
+          </p:txBody>
+        </p:sp>
+        <p:sp>
+          <p:nvSpPr>
+            <p:cNvPr id="6" name="TextBox 5">
+              <a:extLst>
+                <a:ext uri="{FF2B5EF4-FFF2-40B4-BE49-F238E27FC236}">
+                  <a16:creationId xmlns:a16="http://schemas.microsoft.com/office/drawing/2014/main" id="{AAAAF183-699A-FEE1-4DE0-2545E8E3BB5B}"/>
+                </a:ext>
+              </a:extLst>
+            </p:cNvPr>
+            <p:cNvSpPr txBox="1"/>
+            <p:nvPr/>
+          </p:nvSpPr>
+          <p:spPr>
+            <a:xfrm>
+              <a:off x="1560641" y="2483038"/>
+              <a:ext cx="873957" cy="338554"/>
+            </a:xfrm>
+            <a:prstGeom prst="rect">
+              <a:avLst/>
+            </a:prstGeom>
+            <a:noFill/>
+          </p:spPr>
+          <p:txBody>
+            <a:bodyPr wrap="none" rtlCol="0">
+              <a:spAutoFit/>
+            </a:bodyPr>
+            <a:lstStyle/>
+            <a:p>
+              <a:pPr algn="ctr"/>
+              <a:r>
+                <a:rPr lang="en-US" sz="1600" dirty="0">
+                  <a:solidFill>
+                    <a:schemeClr val="bg1"/>
+                  </a:solidFill>
+                </a:rPr>
+                <a:t>2N2222</a:t>
+              </a:r>
+            </a:p>
+          </p:txBody>
+        </p:sp>
+        <p:cxnSp>
+          <p:nvCxnSpPr>
+            <p:cNvPr id="7" name="Straight Connector 6">
+              <a:extLst>
+                <a:ext uri="{FF2B5EF4-FFF2-40B4-BE49-F238E27FC236}">
+                  <a16:creationId xmlns:a16="http://schemas.microsoft.com/office/drawing/2014/main" id="{79968876-EA0F-E509-B625-3D7BB1DC3B45}"/>
+                </a:ext>
+              </a:extLst>
+            </p:cNvPr>
+            <p:cNvCxnSpPr/>
+            <p:nvPr/>
+          </p:nvCxnSpPr>
+          <p:spPr>
+            <a:xfrm>
+              <a:off x="1711614" y="2959336"/>
+              <a:ext cx="0" cy="621656"/>
+            </a:xfrm>
+            <a:prstGeom prst="line">
+              <a:avLst/>
+            </a:prstGeom>
+            <a:ln w="38100">
+              <a:solidFill>
+                <a:schemeClr val="tx1"/>
+              </a:solidFill>
+            </a:ln>
+          </p:spPr>
+          <p:style>
+            <a:lnRef idx="2">
+              <a:schemeClr val="accent1"/>
+            </a:lnRef>
+            <a:fillRef idx="0">
+              <a:schemeClr val="accent1"/>
+            </a:fillRef>
+            <a:effectRef idx="1">
+              <a:schemeClr val="accent1"/>
+            </a:effectRef>
+            <a:fontRef idx="minor">
+              <a:schemeClr val="tx1"/>
+            </a:fontRef>
+          </p:style>
+        </p:cxnSp>
+        <p:cxnSp>
+          <p:nvCxnSpPr>
+            <p:cNvPr id="8" name="Straight Connector 7">
+              <a:extLst>
+                <a:ext uri="{FF2B5EF4-FFF2-40B4-BE49-F238E27FC236}">
+                  <a16:creationId xmlns:a16="http://schemas.microsoft.com/office/drawing/2014/main" id="{77A2AA43-5818-600A-5FE0-9D9BD0ECF34B}"/>
+                </a:ext>
+              </a:extLst>
+            </p:cNvPr>
+            <p:cNvCxnSpPr/>
+            <p:nvPr/>
+          </p:nvCxnSpPr>
+          <p:spPr>
+            <a:xfrm>
+              <a:off x="2008929" y="2959336"/>
+              <a:ext cx="0" cy="621656"/>
+            </a:xfrm>
+            <a:prstGeom prst="line">
+              <a:avLst/>
+            </a:prstGeom>
+            <a:ln w="38100">
+              <a:solidFill>
+                <a:schemeClr val="tx1"/>
+              </a:solidFill>
+            </a:ln>
+          </p:spPr>
+          <p:style>
+            <a:lnRef idx="2">
+              <a:schemeClr val="accent1"/>
+            </a:lnRef>
+            <a:fillRef idx="0">
+              <a:schemeClr val="accent1"/>
+            </a:fillRef>
+            <a:effectRef idx="1">
+              <a:schemeClr val="accent1"/>
+            </a:effectRef>
+            <a:fontRef idx="minor">
+              <a:schemeClr val="tx1"/>
+            </a:fontRef>
+          </p:style>
+        </p:cxnSp>
+        <p:cxnSp>
+          <p:nvCxnSpPr>
+            <p:cNvPr id="9" name="Straight Connector 8">
+              <a:extLst>
+                <a:ext uri="{FF2B5EF4-FFF2-40B4-BE49-F238E27FC236}">
+                  <a16:creationId xmlns:a16="http://schemas.microsoft.com/office/drawing/2014/main" id="{B0B7A85E-B312-B9FA-FBCC-73E00A29E207}"/>
+                </a:ext>
+              </a:extLst>
+            </p:cNvPr>
+            <p:cNvCxnSpPr/>
+            <p:nvPr/>
+          </p:nvCxnSpPr>
+          <p:spPr>
+            <a:xfrm>
+              <a:off x="2293505" y="2962545"/>
+              <a:ext cx="0" cy="621656"/>
+            </a:xfrm>
+            <a:prstGeom prst="line">
+              <a:avLst/>
+            </a:prstGeom>
+            <a:ln w="38100">
+              <a:solidFill>
+                <a:schemeClr val="tx1"/>
+              </a:solidFill>
+            </a:ln>
+          </p:spPr>
+          <p:style>
+            <a:lnRef idx="2">
+              <a:schemeClr val="accent1"/>
+            </a:lnRef>
+            <a:fillRef idx="0">
+              <a:schemeClr val="accent1"/>
+            </a:fillRef>
+            <a:effectRef idx="1">
+              <a:schemeClr val="accent1"/>
+            </a:effectRef>
+            <a:fontRef idx="minor">
+              <a:schemeClr val="tx1"/>
+            </a:fontRef>
+          </p:style>
+        </p:cxnSp>
+        <p:sp>
+          <p:nvSpPr>
+            <p:cNvPr id="10" name="TextBox 9">
+              <a:extLst>
+                <a:ext uri="{FF2B5EF4-FFF2-40B4-BE49-F238E27FC236}">
+                  <a16:creationId xmlns:a16="http://schemas.microsoft.com/office/drawing/2014/main" id="{06D60948-8A91-876C-39AC-84092EDBB78F}"/>
+                </a:ext>
+              </a:extLst>
+            </p:cNvPr>
+            <p:cNvSpPr txBox="1"/>
+            <p:nvPr/>
+          </p:nvSpPr>
+          <p:spPr>
+            <a:xfrm>
+              <a:off x="1346066" y="3001598"/>
+              <a:ext cx="304797" cy="369332"/>
+            </a:xfrm>
+            <a:prstGeom prst="rect">
+              <a:avLst/>
+            </a:prstGeom>
+            <a:noFill/>
+          </p:spPr>
+          <p:txBody>
+            <a:bodyPr wrap="square" rtlCol="0">
+              <a:spAutoFit/>
+            </a:bodyPr>
+            <a:lstStyle/>
+            <a:p>
+              <a:r>
+                <a:rPr lang="en-US" dirty="0"/>
+                <a:t>E</a:t>
+              </a:r>
+            </a:p>
+          </p:txBody>
+        </p:sp>
+        <p:sp>
+          <p:nvSpPr>
+            <p:cNvPr id="11" name="TextBox 10">
+              <a:extLst>
+                <a:ext uri="{FF2B5EF4-FFF2-40B4-BE49-F238E27FC236}">
+                  <a16:creationId xmlns:a16="http://schemas.microsoft.com/office/drawing/2014/main" id="{9F755D13-16AC-A1E1-1677-A6897B09A42A}"/>
+                </a:ext>
+              </a:extLst>
+            </p:cNvPr>
+            <p:cNvSpPr txBox="1"/>
+            <p:nvPr/>
+          </p:nvSpPr>
+          <p:spPr>
+            <a:xfrm>
+              <a:off x="2360147" y="2994650"/>
+              <a:ext cx="304797" cy="369332"/>
+            </a:xfrm>
+            <a:prstGeom prst="rect">
+              <a:avLst/>
+            </a:prstGeom>
+            <a:noFill/>
+          </p:spPr>
+          <p:txBody>
+            <a:bodyPr wrap="square" rtlCol="0">
+              <a:spAutoFit/>
+            </a:bodyPr>
+            <a:lstStyle/>
+            <a:p>
+              <a:r>
+                <a:rPr lang="en-US" dirty="0"/>
+                <a:t>C</a:t>
+              </a:r>
+            </a:p>
+          </p:txBody>
+        </p:sp>
+        <p:sp>
+          <p:nvSpPr>
+            <p:cNvPr id="12" name="TextBox 11">
+              <a:extLst>
+                <a:ext uri="{FF2B5EF4-FFF2-40B4-BE49-F238E27FC236}">
+                  <a16:creationId xmlns:a16="http://schemas.microsoft.com/office/drawing/2014/main" id="{60220D0A-6608-7619-B0EA-772B6285C05D}"/>
+                </a:ext>
+              </a:extLst>
+            </p:cNvPr>
+            <p:cNvSpPr txBox="1"/>
+            <p:nvPr/>
+          </p:nvSpPr>
+          <p:spPr>
+            <a:xfrm>
+              <a:off x="1856530" y="3641160"/>
+              <a:ext cx="304797" cy="369332"/>
+            </a:xfrm>
+            <a:prstGeom prst="rect">
+              <a:avLst/>
+            </a:prstGeom>
+            <a:noFill/>
+          </p:spPr>
+          <p:txBody>
+            <a:bodyPr wrap="square" rtlCol="0">
+              <a:spAutoFit/>
+            </a:bodyPr>
+            <a:lstStyle/>
+            <a:p>
+              <a:r>
+                <a:rPr lang="en-US" dirty="0"/>
+                <a:t>B</a:t>
+              </a:r>
+            </a:p>
+          </p:txBody>
+        </p:sp>
+      </p:grpSp>
+      <p:sp>
+        <p:nvSpPr>
+          <p:cNvPr id="13" name="Oval 12">
+            <a:extLst>
+              <a:ext uri="{FF2B5EF4-FFF2-40B4-BE49-F238E27FC236}">
+                <a16:creationId xmlns:a16="http://schemas.microsoft.com/office/drawing/2014/main" id="{CFC7BCE2-B4BE-ECCE-7870-579759D5FC05}"/>
+              </a:ext>
+            </a:extLst>
+          </p:cNvPr>
+          <p:cNvSpPr/>
+          <p:nvPr/>
+        </p:nvSpPr>
+        <p:spPr>
+          <a:xfrm>
+            <a:off x="6726789" y="2216460"/>
+            <a:ext cx="830317" cy="483476"/>
+          </a:xfrm>
+          <a:prstGeom prst="ellipse">
+            <a:avLst/>
+          </a:prstGeom>
+          <a:solidFill>
+            <a:schemeClr val="tx1">
+              <a:lumMod val="75000"/>
+              <a:lumOff val="25000"/>
+            </a:schemeClr>
+          </a:solidFill>
+        </p:spPr>
+        <p:style>
+          <a:lnRef idx="2">
+            <a:schemeClr val="accent1">
+              <a:shade val="15000"/>
+            </a:schemeClr>
+          </a:lnRef>
+          <a:fillRef idx="1">
+            <a:schemeClr val="accent1"/>
+          </a:fillRef>
+          <a:effectRef idx="0">
+            <a:schemeClr val="accent1"/>
+          </a:effectRef>
+          <a:fontRef idx="minor">
+            <a:schemeClr val="lt1"/>
+          </a:fontRef>
+        </p:style>
+        <p:txBody>
+          <a:bodyPr rtlCol="0" anchor="ctr"/>
+          <a:lstStyle/>
+          <a:p>
+            <a:pPr algn="ctr"/>
+            <a:endParaRPr lang="en-US"/>
+          </a:p>
+        </p:txBody>
+      </p:sp>
+      <p:sp>
+        <p:nvSpPr>
+          <p:cNvPr id="14" name="Rectangle 13">
+            <a:extLst>
+              <a:ext uri="{FF2B5EF4-FFF2-40B4-BE49-F238E27FC236}">
+                <a16:creationId xmlns:a16="http://schemas.microsoft.com/office/drawing/2014/main" id="{EAFCEC0F-CAF7-5245-2528-732A640A43CF}"/>
+              </a:ext>
+            </a:extLst>
+          </p:cNvPr>
+          <p:cNvSpPr/>
+          <p:nvPr/>
+        </p:nvSpPr>
+        <p:spPr>
+          <a:xfrm>
+            <a:off x="6723595" y="2488812"/>
+            <a:ext cx="830317" cy="597611"/>
+          </a:xfrm>
+          <a:prstGeom prst="rect">
+            <a:avLst/>
+          </a:prstGeom>
+          <a:solidFill>
+            <a:schemeClr val="tx1">
+              <a:lumMod val="75000"/>
+              <a:lumOff val="25000"/>
+            </a:schemeClr>
+          </a:solidFill>
+        </p:spPr>
+        <p:style>
+          <a:lnRef idx="2">
+            <a:schemeClr val="accent1">
+              <a:shade val="15000"/>
+            </a:schemeClr>
+          </a:lnRef>
+          <a:fillRef idx="1">
+            <a:schemeClr val="accent1"/>
+          </a:fillRef>
+          <a:effectRef idx="0">
+            <a:schemeClr val="accent1"/>
+          </a:effectRef>
+          <a:fontRef idx="minor">
+            <a:schemeClr val="lt1"/>
+          </a:fontRef>
+        </p:style>
+        <p:txBody>
+          <a:bodyPr rtlCol="0" anchor="ctr"/>
+          <a:lstStyle/>
+          <a:p>
+            <a:pPr algn="ctr"/>
+            <a:endParaRPr lang="en-US">
+              <a:solidFill>
+                <a:schemeClr val="bg1"/>
+              </a:solidFill>
+            </a:endParaRPr>
+          </a:p>
+        </p:txBody>
+      </p:sp>
+      <p:sp>
+        <p:nvSpPr>
+          <p:cNvPr id="15" name="TextBox 14">
+            <a:extLst>
+              <a:ext uri="{FF2B5EF4-FFF2-40B4-BE49-F238E27FC236}">
+                <a16:creationId xmlns:a16="http://schemas.microsoft.com/office/drawing/2014/main" id="{AFF4C0EE-A187-9E0A-5230-590877F654B3}"/>
+              </a:ext>
+            </a:extLst>
+          </p:cNvPr>
+          <p:cNvSpPr txBox="1"/>
+          <p:nvPr/>
+        </p:nvSpPr>
+        <p:spPr>
+          <a:xfrm>
+            <a:off x="6690465" y="2618340"/>
+            <a:ext cx="873957" cy="338554"/>
+          </a:xfrm>
+          <a:prstGeom prst="rect">
+            <a:avLst/>
+          </a:prstGeom>
+          <a:noFill/>
+        </p:spPr>
+        <p:txBody>
+          <a:bodyPr wrap="none" rtlCol="0">
+            <a:spAutoFit/>
+          </a:bodyPr>
+          <a:lstStyle/>
+          <a:p>
+            <a:pPr algn="ctr"/>
+            <a:r>
+              <a:rPr lang="en-US" sz="1600" dirty="0">
+                <a:solidFill>
+                  <a:schemeClr val="bg1"/>
+                </a:solidFill>
+              </a:rPr>
+              <a:t>2N2222</a:t>
+            </a:r>
+          </a:p>
+        </p:txBody>
+      </p:sp>
+      <p:cxnSp>
+        <p:nvCxnSpPr>
+          <p:cNvPr id="16" name="Straight Connector 15">
+            <a:extLst>
+              <a:ext uri="{FF2B5EF4-FFF2-40B4-BE49-F238E27FC236}">
+                <a16:creationId xmlns:a16="http://schemas.microsoft.com/office/drawing/2014/main" id="{7495477E-BCF9-54BF-384B-7C177E7018FB}"/>
+              </a:ext>
+            </a:extLst>
+          </p:cNvPr>
+          <p:cNvCxnSpPr>
+            <a:cxnSpLocks/>
+          </p:cNvCxnSpPr>
+          <p:nvPr/>
+        </p:nvCxnSpPr>
+        <p:spPr>
+          <a:xfrm>
+            <a:off x="6841438" y="3094638"/>
+            <a:ext cx="0" cy="1305014"/>
+          </a:xfrm>
+          <a:prstGeom prst="line">
+            <a:avLst/>
+          </a:prstGeom>
+          <a:ln w="38100">
+            <a:solidFill>
+              <a:schemeClr val="tx1"/>
+            </a:solidFill>
+          </a:ln>
+        </p:spPr>
+        <p:style>
+          <a:lnRef idx="2">
+            <a:schemeClr val="accent1"/>
+          </a:lnRef>
+          <a:fillRef idx="0">
+            <a:schemeClr val="accent1"/>
+          </a:fillRef>
+          <a:effectRef idx="1">
+            <a:schemeClr val="accent1"/>
+          </a:effectRef>
+          <a:fontRef idx="minor">
+            <a:schemeClr val="tx1"/>
+          </a:fontRef>
+        </p:style>
+      </p:cxnSp>
+      <p:cxnSp>
+        <p:nvCxnSpPr>
+          <p:cNvPr id="17" name="Straight Connector 16">
+            <a:extLst>
+              <a:ext uri="{FF2B5EF4-FFF2-40B4-BE49-F238E27FC236}">
+                <a16:creationId xmlns:a16="http://schemas.microsoft.com/office/drawing/2014/main" id="{05FAA606-5B46-C406-7E6F-2DBE745B5779}"/>
+              </a:ext>
+            </a:extLst>
+          </p:cNvPr>
+          <p:cNvCxnSpPr>
+            <a:cxnSpLocks/>
+          </p:cNvCxnSpPr>
+          <p:nvPr/>
+        </p:nvCxnSpPr>
+        <p:spPr>
+          <a:xfrm>
+            <a:off x="7138753" y="3094638"/>
+            <a:ext cx="0" cy="266141"/>
+          </a:xfrm>
+          <a:prstGeom prst="line">
+            <a:avLst/>
+          </a:prstGeom>
+          <a:ln w="38100">
+            <a:solidFill>
+              <a:schemeClr val="tx1"/>
+            </a:solidFill>
+          </a:ln>
+        </p:spPr>
+        <p:style>
+          <a:lnRef idx="2">
+            <a:schemeClr val="accent1"/>
+          </a:lnRef>
+          <a:fillRef idx="0">
+            <a:schemeClr val="accent1"/>
+          </a:fillRef>
+          <a:effectRef idx="1">
+            <a:schemeClr val="accent1"/>
+          </a:effectRef>
+          <a:fontRef idx="minor">
+            <a:schemeClr val="tx1"/>
+          </a:fontRef>
+        </p:style>
+      </p:cxnSp>
+      <p:cxnSp>
+        <p:nvCxnSpPr>
+          <p:cNvPr id="18" name="Straight Connector 17">
+            <a:extLst>
+              <a:ext uri="{FF2B5EF4-FFF2-40B4-BE49-F238E27FC236}">
+                <a16:creationId xmlns:a16="http://schemas.microsoft.com/office/drawing/2014/main" id="{32195D39-645F-00DD-BFED-DB7E0AC824D0}"/>
+              </a:ext>
+            </a:extLst>
+          </p:cNvPr>
+          <p:cNvCxnSpPr>
+            <a:cxnSpLocks/>
+          </p:cNvCxnSpPr>
+          <p:nvPr/>
+        </p:nvCxnSpPr>
+        <p:spPr>
+          <a:xfrm>
+            <a:off x="7423329" y="3097847"/>
+            <a:ext cx="0" cy="262932"/>
+          </a:xfrm>
+          <a:prstGeom prst="line">
+            <a:avLst/>
+          </a:prstGeom>
+          <a:ln w="38100">
+            <a:solidFill>
+              <a:schemeClr val="tx1"/>
+            </a:solidFill>
+          </a:ln>
+        </p:spPr>
+        <p:style>
+          <a:lnRef idx="2">
+            <a:schemeClr val="accent1"/>
+          </a:lnRef>
+          <a:fillRef idx="0">
+            <a:schemeClr val="accent1"/>
+          </a:fillRef>
+          <a:effectRef idx="1">
+            <a:schemeClr val="accent1"/>
+          </a:effectRef>
+          <a:fontRef idx="minor">
+            <a:schemeClr val="tx1"/>
+          </a:fontRef>
+        </p:style>
+      </p:cxnSp>
+      <p:sp>
+        <p:nvSpPr>
+          <p:cNvPr id="19" name="TextBox 18">
+            <a:extLst>
+              <a:ext uri="{FF2B5EF4-FFF2-40B4-BE49-F238E27FC236}">
+                <a16:creationId xmlns:a16="http://schemas.microsoft.com/office/drawing/2014/main" id="{ABE71B3E-16A6-E7FD-7AEF-CC744F14940D}"/>
+              </a:ext>
+            </a:extLst>
+          </p:cNvPr>
+          <p:cNvSpPr txBox="1"/>
+          <p:nvPr/>
+        </p:nvSpPr>
+        <p:spPr>
+          <a:xfrm>
+            <a:off x="6418798" y="3791541"/>
+            <a:ext cx="304797" cy="369332"/>
+          </a:xfrm>
+          <a:prstGeom prst="rect">
+            <a:avLst/>
+          </a:prstGeom>
+          <a:noFill/>
+        </p:spPr>
+        <p:txBody>
+          <a:bodyPr wrap="square" rtlCol="0">
+            <a:spAutoFit/>
+          </a:bodyPr>
+          <a:lstStyle/>
+          <a:p>
+            <a:r>
+              <a:rPr lang="en-US" dirty="0"/>
+              <a:t>E</a:t>
+            </a:r>
+          </a:p>
+        </p:txBody>
+      </p:sp>
+      <p:sp>
+        <p:nvSpPr>
+          <p:cNvPr id="20" name="TextBox 19">
+            <a:extLst>
+              <a:ext uri="{FF2B5EF4-FFF2-40B4-BE49-F238E27FC236}">
+                <a16:creationId xmlns:a16="http://schemas.microsoft.com/office/drawing/2014/main" id="{613C97A6-082A-D43F-28CC-A9EC8AB91B23}"/>
+              </a:ext>
+            </a:extLst>
+          </p:cNvPr>
+          <p:cNvSpPr txBox="1"/>
+          <p:nvPr/>
+        </p:nvSpPr>
+        <p:spPr>
+          <a:xfrm>
+            <a:off x="7553912" y="3743185"/>
+            <a:ext cx="304797" cy="369332"/>
+          </a:xfrm>
+          <a:prstGeom prst="rect">
+            <a:avLst/>
+          </a:prstGeom>
+          <a:noFill/>
+        </p:spPr>
+        <p:txBody>
+          <a:bodyPr wrap="square" rtlCol="0">
+            <a:spAutoFit/>
+          </a:bodyPr>
+          <a:lstStyle/>
+          <a:p>
+            <a:r>
+              <a:rPr lang="en-US" dirty="0"/>
+              <a:t>C</a:t>
+            </a:r>
+          </a:p>
+        </p:txBody>
+      </p:sp>
+      <p:sp>
+        <p:nvSpPr>
+          <p:cNvPr id="21" name="TextBox 20">
+            <a:extLst>
+              <a:ext uri="{FF2B5EF4-FFF2-40B4-BE49-F238E27FC236}">
+                <a16:creationId xmlns:a16="http://schemas.microsoft.com/office/drawing/2014/main" id="{610B5CCB-525E-9620-1406-AB0CBCEC48FF}"/>
+              </a:ext>
+            </a:extLst>
+          </p:cNvPr>
+          <p:cNvSpPr txBox="1"/>
+          <p:nvPr/>
+        </p:nvSpPr>
+        <p:spPr>
+          <a:xfrm>
+            <a:off x="6384244" y="2963819"/>
+            <a:ext cx="304797" cy="369332"/>
+          </a:xfrm>
+          <a:prstGeom prst="rect">
+            <a:avLst/>
+          </a:prstGeom>
+          <a:noFill/>
+        </p:spPr>
+        <p:txBody>
+          <a:bodyPr wrap="square" rtlCol="0">
+            <a:spAutoFit/>
+          </a:bodyPr>
+          <a:lstStyle/>
+          <a:p>
+            <a:r>
+              <a:rPr lang="en-US" dirty="0"/>
+              <a:t>B</a:t>
+            </a:r>
+          </a:p>
+        </p:txBody>
+      </p:sp>
+      <p:cxnSp>
+        <p:nvCxnSpPr>
+          <p:cNvPr id="24" name="Straight Connector 23">
+            <a:extLst>
+              <a:ext uri="{FF2B5EF4-FFF2-40B4-BE49-F238E27FC236}">
+                <a16:creationId xmlns:a16="http://schemas.microsoft.com/office/drawing/2014/main" id="{C7EEC42C-B905-58EE-18F8-72A677F00047}"/>
+              </a:ext>
+            </a:extLst>
+          </p:cNvPr>
+          <p:cNvCxnSpPr>
+            <a:cxnSpLocks/>
+          </p:cNvCxnSpPr>
+          <p:nvPr/>
+        </p:nvCxnSpPr>
+        <p:spPr>
+          <a:xfrm>
+            <a:off x="6230871" y="3360779"/>
+            <a:ext cx="919188" cy="0"/>
+          </a:xfrm>
+          <a:prstGeom prst="line">
+            <a:avLst/>
+          </a:prstGeom>
+          <a:ln w="38100">
+            <a:solidFill>
+              <a:schemeClr val="tx1"/>
+            </a:solidFill>
+          </a:ln>
+        </p:spPr>
+        <p:style>
+          <a:lnRef idx="2">
+            <a:schemeClr val="accent1"/>
+          </a:lnRef>
+          <a:fillRef idx="0">
+            <a:schemeClr val="accent1"/>
+          </a:fillRef>
+          <a:effectRef idx="1">
+            <a:schemeClr val="accent1"/>
+          </a:effectRef>
+          <a:fontRef idx="minor">
+            <a:schemeClr val="tx1"/>
+          </a:fontRef>
+        </p:style>
+      </p:cxnSp>
+      <p:cxnSp>
+        <p:nvCxnSpPr>
+          <p:cNvPr id="29" name="Straight Connector 28">
+            <a:extLst>
+              <a:ext uri="{FF2B5EF4-FFF2-40B4-BE49-F238E27FC236}">
+                <a16:creationId xmlns:a16="http://schemas.microsoft.com/office/drawing/2014/main" id="{C09D56D5-B3B0-0A59-C9CE-7B74478EB98B}"/>
+              </a:ext>
+            </a:extLst>
+          </p:cNvPr>
+          <p:cNvCxnSpPr>
+            <a:cxnSpLocks/>
+          </p:cNvCxnSpPr>
+          <p:nvPr/>
+        </p:nvCxnSpPr>
+        <p:spPr>
+          <a:xfrm>
+            <a:off x="7399115" y="3360779"/>
+            <a:ext cx="919188" cy="0"/>
+          </a:xfrm>
+          <a:prstGeom prst="line">
+            <a:avLst/>
+          </a:prstGeom>
+          <a:ln w="38100">
+            <a:solidFill>
+              <a:schemeClr val="tx1"/>
+            </a:solidFill>
+          </a:ln>
+        </p:spPr>
+        <p:style>
+          <a:lnRef idx="2">
+            <a:schemeClr val="accent1"/>
+          </a:lnRef>
+          <a:fillRef idx="0">
+            <a:schemeClr val="accent1"/>
+          </a:fillRef>
+          <a:effectRef idx="1">
+            <a:schemeClr val="accent1"/>
+          </a:effectRef>
+          <a:fontRef idx="minor">
+            <a:schemeClr val="tx1"/>
+          </a:fontRef>
+        </p:style>
+      </p:cxnSp>
+      <p:sp>
+        <p:nvSpPr>
+          <p:cNvPr id="30" name="Freeform 29">
+            <a:extLst>
+              <a:ext uri="{FF2B5EF4-FFF2-40B4-BE49-F238E27FC236}">
+                <a16:creationId xmlns:a16="http://schemas.microsoft.com/office/drawing/2014/main" id="{CFE0D6AE-1F33-A0F7-75EB-FF5BBACA316D}"/>
+              </a:ext>
+            </a:extLst>
+          </p:cNvPr>
+          <p:cNvSpPr/>
+          <p:nvPr/>
+        </p:nvSpPr>
+        <p:spPr>
+          <a:xfrm>
+            <a:off x="5046650" y="3288774"/>
+            <a:ext cx="1212897" cy="144009"/>
+          </a:xfrm>
+          <a:custGeom>
+            <a:avLst/>
+            <a:gdLst>
+              <a:gd name="connsiteX0" fmla="*/ 0 w 6635579"/>
+              <a:gd name="connsiteY0" fmla="*/ 580768 h 1172959"/>
+              <a:gd name="connsiteX1" fmla="*/ 1470454 w 6635579"/>
+              <a:gd name="connsiteY1" fmla="*/ 580768 h 1172959"/>
+              <a:gd name="connsiteX2" fmla="*/ 1779373 w 6635579"/>
+              <a:gd name="connsiteY2" fmla="*/ 24713 h 1172959"/>
+              <a:gd name="connsiteX3" fmla="*/ 2409568 w 6635579"/>
+              <a:gd name="connsiteY3" fmla="*/ 1161535 h 1172959"/>
+              <a:gd name="connsiteX4" fmla="*/ 3039762 w 6635579"/>
+              <a:gd name="connsiteY4" fmla="*/ 37070 h 1172959"/>
+              <a:gd name="connsiteX5" fmla="*/ 3645244 w 6635579"/>
+              <a:gd name="connsiteY5" fmla="*/ 1161535 h 1172959"/>
+              <a:gd name="connsiteX6" fmla="*/ 4275438 w 6635579"/>
+              <a:gd name="connsiteY6" fmla="*/ 0 h 1172959"/>
+              <a:gd name="connsiteX7" fmla="*/ 4917990 w 6635579"/>
+              <a:gd name="connsiteY7" fmla="*/ 1161535 h 1172959"/>
+              <a:gd name="connsiteX8" fmla="*/ 5263979 w 6635579"/>
+              <a:gd name="connsiteY8" fmla="*/ 593124 h 1172959"/>
+              <a:gd name="connsiteX9" fmla="*/ 6635579 w 6635579"/>
+              <a:gd name="connsiteY9" fmla="*/ 593124 h 1172959"/>
+              <a:gd name="connsiteX10" fmla="*/ 6635579 w 6635579"/>
+              <a:gd name="connsiteY10" fmla="*/ 593124 h 1172959"/>
+              <a:gd name="connsiteX11" fmla="*/ 6635579 w 6635579"/>
+              <a:gd name="connsiteY11" fmla="*/ 593124 h 1172959"/>
+              <a:gd name="connsiteX0" fmla="*/ 0 w 6635579"/>
+              <a:gd name="connsiteY0" fmla="*/ 580768 h 1172959"/>
+              <a:gd name="connsiteX1" fmla="*/ 1470454 w 6635579"/>
+              <a:gd name="connsiteY1" fmla="*/ 580768 h 1172959"/>
+              <a:gd name="connsiteX2" fmla="*/ 1779373 w 6635579"/>
+              <a:gd name="connsiteY2" fmla="*/ 24713 h 1172959"/>
+              <a:gd name="connsiteX3" fmla="*/ 2409568 w 6635579"/>
+              <a:gd name="connsiteY3" fmla="*/ 1161535 h 1172959"/>
+              <a:gd name="connsiteX4" fmla="*/ 3039762 w 6635579"/>
+              <a:gd name="connsiteY4" fmla="*/ 37070 h 1172959"/>
+              <a:gd name="connsiteX5" fmla="*/ 3645244 w 6635579"/>
+              <a:gd name="connsiteY5" fmla="*/ 1161535 h 1172959"/>
+              <a:gd name="connsiteX6" fmla="*/ 4275438 w 6635579"/>
+              <a:gd name="connsiteY6" fmla="*/ 0 h 1172959"/>
+              <a:gd name="connsiteX7" fmla="*/ 4917990 w 6635579"/>
+              <a:gd name="connsiteY7" fmla="*/ 1161535 h 1172959"/>
+              <a:gd name="connsiteX8" fmla="*/ 5263979 w 6635579"/>
+              <a:gd name="connsiteY8" fmla="*/ 593124 h 1172959"/>
+              <a:gd name="connsiteX9" fmla="*/ 6635579 w 6635579"/>
+              <a:gd name="connsiteY9" fmla="*/ 593124 h 1172959"/>
+              <a:gd name="connsiteX10" fmla="*/ 6635579 w 6635579"/>
+              <a:gd name="connsiteY10" fmla="*/ 593124 h 1172959"/>
+              <a:gd name="connsiteX11" fmla="*/ 6635579 w 6635579"/>
+              <a:gd name="connsiteY11" fmla="*/ 593124 h 1172959"/>
+              <a:gd name="connsiteX0" fmla="*/ 0 w 6635579"/>
+              <a:gd name="connsiteY0" fmla="*/ 580768 h 1172959"/>
+              <a:gd name="connsiteX1" fmla="*/ 1470454 w 6635579"/>
+              <a:gd name="connsiteY1" fmla="*/ 580768 h 1172959"/>
+              <a:gd name="connsiteX2" fmla="*/ 1779373 w 6635579"/>
+              <a:gd name="connsiteY2" fmla="*/ 24713 h 1172959"/>
+              <a:gd name="connsiteX3" fmla="*/ 2409568 w 6635579"/>
+              <a:gd name="connsiteY3" fmla="*/ 1161535 h 1172959"/>
+              <a:gd name="connsiteX4" fmla="*/ 3039762 w 6635579"/>
+              <a:gd name="connsiteY4" fmla="*/ 37070 h 1172959"/>
+              <a:gd name="connsiteX5" fmla="*/ 3645244 w 6635579"/>
+              <a:gd name="connsiteY5" fmla="*/ 1161535 h 1172959"/>
+              <a:gd name="connsiteX6" fmla="*/ 4275438 w 6635579"/>
+              <a:gd name="connsiteY6" fmla="*/ 0 h 1172959"/>
+              <a:gd name="connsiteX7" fmla="*/ 4917990 w 6635579"/>
+              <a:gd name="connsiteY7" fmla="*/ 1161535 h 1172959"/>
+              <a:gd name="connsiteX8" fmla="*/ 5263979 w 6635579"/>
+              <a:gd name="connsiteY8" fmla="*/ 593124 h 1172959"/>
+              <a:gd name="connsiteX9" fmla="*/ 6635579 w 6635579"/>
+              <a:gd name="connsiteY9" fmla="*/ 593124 h 1172959"/>
+              <a:gd name="connsiteX10" fmla="*/ 6635579 w 6635579"/>
+              <a:gd name="connsiteY10" fmla="*/ 593124 h 1172959"/>
+              <a:gd name="connsiteX11" fmla="*/ 6635579 w 6635579"/>
+              <a:gd name="connsiteY11" fmla="*/ 593124 h 1172959"/>
+              <a:gd name="connsiteX0" fmla="*/ 0 w 6635579"/>
+              <a:gd name="connsiteY0" fmla="*/ 580768 h 1172959"/>
+              <a:gd name="connsiteX1" fmla="*/ 1470454 w 6635579"/>
+              <a:gd name="connsiteY1" fmla="*/ 580768 h 1172959"/>
+              <a:gd name="connsiteX2" fmla="*/ 1779373 w 6635579"/>
+              <a:gd name="connsiteY2" fmla="*/ 24713 h 1172959"/>
+              <a:gd name="connsiteX3" fmla="*/ 2409568 w 6635579"/>
+              <a:gd name="connsiteY3" fmla="*/ 1161535 h 1172959"/>
+              <a:gd name="connsiteX4" fmla="*/ 3039762 w 6635579"/>
+              <a:gd name="connsiteY4" fmla="*/ 37070 h 1172959"/>
+              <a:gd name="connsiteX5" fmla="*/ 3645244 w 6635579"/>
+              <a:gd name="connsiteY5" fmla="*/ 1161535 h 1172959"/>
+              <a:gd name="connsiteX6" fmla="*/ 4275438 w 6635579"/>
+              <a:gd name="connsiteY6" fmla="*/ 0 h 1172959"/>
+              <a:gd name="connsiteX7" fmla="*/ 4917990 w 6635579"/>
+              <a:gd name="connsiteY7" fmla="*/ 1161535 h 1172959"/>
+              <a:gd name="connsiteX8" fmla="*/ 5263979 w 6635579"/>
+              <a:gd name="connsiteY8" fmla="*/ 593124 h 1172959"/>
+              <a:gd name="connsiteX9" fmla="*/ 6635579 w 6635579"/>
+              <a:gd name="connsiteY9" fmla="*/ 593124 h 1172959"/>
+              <a:gd name="connsiteX10" fmla="*/ 6635579 w 6635579"/>
+              <a:gd name="connsiteY10" fmla="*/ 593124 h 1172959"/>
+              <a:gd name="connsiteX11" fmla="*/ 6635579 w 6635579"/>
+              <a:gd name="connsiteY11" fmla="*/ 593124 h 1172959"/>
+              <a:gd name="connsiteX0" fmla="*/ 0 w 6635579"/>
+              <a:gd name="connsiteY0" fmla="*/ 580768 h 1172959"/>
+              <a:gd name="connsiteX1" fmla="*/ 1470454 w 6635579"/>
+              <a:gd name="connsiteY1" fmla="*/ 580768 h 1172959"/>
+              <a:gd name="connsiteX2" fmla="*/ 1779373 w 6635579"/>
+              <a:gd name="connsiteY2" fmla="*/ 24713 h 1172959"/>
+              <a:gd name="connsiteX3" fmla="*/ 2409568 w 6635579"/>
+              <a:gd name="connsiteY3" fmla="*/ 1161535 h 1172959"/>
+              <a:gd name="connsiteX4" fmla="*/ 3039762 w 6635579"/>
+              <a:gd name="connsiteY4" fmla="*/ 37070 h 1172959"/>
+              <a:gd name="connsiteX5" fmla="*/ 3645244 w 6635579"/>
+              <a:gd name="connsiteY5" fmla="*/ 1161535 h 1172959"/>
+              <a:gd name="connsiteX6" fmla="*/ 4275438 w 6635579"/>
+              <a:gd name="connsiteY6" fmla="*/ 0 h 1172959"/>
+              <a:gd name="connsiteX7" fmla="*/ 4917990 w 6635579"/>
+              <a:gd name="connsiteY7" fmla="*/ 1161535 h 1172959"/>
+              <a:gd name="connsiteX8" fmla="*/ 5263979 w 6635579"/>
+              <a:gd name="connsiteY8" fmla="*/ 593124 h 1172959"/>
+              <a:gd name="connsiteX9" fmla="*/ 6635579 w 6635579"/>
+              <a:gd name="connsiteY9" fmla="*/ 593124 h 1172959"/>
+              <a:gd name="connsiteX10" fmla="*/ 6635579 w 6635579"/>
+              <a:gd name="connsiteY10" fmla="*/ 593124 h 1172959"/>
+              <a:gd name="connsiteX11" fmla="*/ 6635579 w 6635579"/>
+              <a:gd name="connsiteY11" fmla="*/ 593124 h 1172959"/>
+              <a:gd name="connsiteX0" fmla="*/ 0 w 6635579"/>
+              <a:gd name="connsiteY0" fmla="*/ 580768 h 1172959"/>
+              <a:gd name="connsiteX1" fmla="*/ 1470454 w 6635579"/>
+              <a:gd name="connsiteY1" fmla="*/ 580768 h 1172959"/>
+              <a:gd name="connsiteX2" fmla="*/ 1779373 w 6635579"/>
+              <a:gd name="connsiteY2" fmla="*/ 24713 h 1172959"/>
+              <a:gd name="connsiteX3" fmla="*/ 2409568 w 6635579"/>
+              <a:gd name="connsiteY3" fmla="*/ 1161535 h 1172959"/>
+              <a:gd name="connsiteX4" fmla="*/ 3039762 w 6635579"/>
+              <a:gd name="connsiteY4" fmla="*/ 37070 h 1172959"/>
+              <a:gd name="connsiteX5" fmla="*/ 3645244 w 6635579"/>
+              <a:gd name="connsiteY5" fmla="*/ 1161535 h 1172959"/>
+              <a:gd name="connsiteX6" fmla="*/ 4275438 w 6635579"/>
+              <a:gd name="connsiteY6" fmla="*/ 0 h 1172959"/>
+              <a:gd name="connsiteX7" fmla="*/ 4917990 w 6635579"/>
+              <a:gd name="connsiteY7" fmla="*/ 1161535 h 1172959"/>
+              <a:gd name="connsiteX8" fmla="*/ 5263979 w 6635579"/>
+              <a:gd name="connsiteY8" fmla="*/ 593124 h 1172959"/>
+              <a:gd name="connsiteX9" fmla="*/ 6635579 w 6635579"/>
+              <a:gd name="connsiteY9" fmla="*/ 593124 h 1172959"/>
+              <a:gd name="connsiteX10" fmla="*/ 6635579 w 6635579"/>
+              <a:gd name="connsiteY10" fmla="*/ 593124 h 1172959"/>
+              <a:gd name="connsiteX11" fmla="*/ 6635579 w 6635579"/>
+              <a:gd name="connsiteY11" fmla="*/ 593124 h 1172959"/>
+              <a:gd name="connsiteX0" fmla="*/ 0 w 6635579"/>
+              <a:gd name="connsiteY0" fmla="*/ 580768 h 1172959"/>
+              <a:gd name="connsiteX1" fmla="*/ 1470454 w 6635579"/>
+              <a:gd name="connsiteY1" fmla="*/ 580768 h 1172959"/>
+              <a:gd name="connsiteX2" fmla="*/ 1779373 w 6635579"/>
+              <a:gd name="connsiteY2" fmla="*/ 24713 h 1172959"/>
+              <a:gd name="connsiteX3" fmla="*/ 2409568 w 6635579"/>
+              <a:gd name="connsiteY3" fmla="*/ 1161535 h 1172959"/>
+              <a:gd name="connsiteX4" fmla="*/ 3039762 w 6635579"/>
+              <a:gd name="connsiteY4" fmla="*/ 37070 h 1172959"/>
+              <a:gd name="connsiteX5" fmla="*/ 3645244 w 6635579"/>
+              <a:gd name="connsiteY5" fmla="*/ 1161535 h 1172959"/>
+              <a:gd name="connsiteX6" fmla="*/ 4275438 w 6635579"/>
+              <a:gd name="connsiteY6" fmla="*/ 0 h 1172959"/>
+              <a:gd name="connsiteX7" fmla="*/ 4917990 w 6635579"/>
+              <a:gd name="connsiteY7" fmla="*/ 1161535 h 1172959"/>
+              <a:gd name="connsiteX8" fmla="*/ 5263979 w 6635579"/>
+              <a:gd name="connsiteY8" fmla="*/ 593124 h 1172959"/>
+              <a:gd name="connsiteX9" fmla="*/ 6635579 w 6635579"/>
+              <a:gd name="connsiteY9" fmla="*/ 593124 h 1172959"/>
+              <a:gd name="connsiteX10" fmla="*/ 6635579 w 6635579"/>
+              <a:gd name="connsiteY10" fmla="*/ 593124 h 1172959"/>
+              <a:gd name="connsiteX11" fmla="*/ 6635579 w 6635579"/>
+              <a:gd name="connsiteY11" fmla="*/ 593124 h 1172959"/>
+              <a:gd name="connsiteX0" fmla="*/ 0 w 6635579"/>
+              <a:gd name="connsiteY0" fmla="*/ 580768 h 1172959"/>
+              <a:gd name="connsiteX1" fmla="*/ 1470454 w 6635579"/>
+              <a:gd name="connsiteY1" fmla="*/ 580768 h 1172959"/>
+              <a:gd name="connsiteX2" fmla="*/ 1779373 w 6635579"/>
+              <a:gd name="connsiteY2" fmla="*/ 24713 h 1172959"/>
+              <a:gd name="connsiteX3" fmla="*/ 2409568 w 6635579"/>
+              <a:gd name="connsiteY3" fmla="*/ 1161535 h 1172959"/>
+              <a:gd name="connsiteX4" fmla="*/ 3039762 w 6635579"/>
+              <a:gd name="connsiteY4" fmla="*/ 37070 h 1172959"/>
+              <a:gd name="connsiteX5" fmla="*/ 3645244 w 6635579"/>
+              <a:gd name="connsiteY5" fmla="*/ 1161535 h 1172959"/>
+              <a:gd name="connsiteX6" fmla="*/ 4275438 w 6635579"/>
+              <a:gd name="connsiteY6" fmla="*/ 0 h 1172959"/>
+              <a:gd name="connsiteX7" fmla="*/ 4917990 w 6635579"/>
+              <a:gd name="connsiteY7" fmla="*/ 1161535 h 1172959"/>
+              <a:gd name="connsiteX8" fmla="*/ 5263979 w 6635579"/>
+              <a:gd name="connsiteY8" fmla="*/ 593124 h 1172959"/>
+              <a:gd name="connsiteX9" fmla="*/ 6635579 w 6635579"/>
+              <a:gd name="connsiteY9" fmla="*/ 593124 h 1172959"/>
+              <a:gd name="connsiteX10" fmla="*/ 6635579 w 6635579"/>
+              <a:gd name="connsiteY10" fmla="*/ 593124 h 1172959"/>
+              <a:gd name="connsiteX11" fmla="*/ 6635579 w 6635579"/>
+              <a:gd name="connsiteY11" fmla="*/ 593124 h 1172959"/>
+              <a:gd name="connsiteX0" fmla="*/ 0 w 6635579"/>
+              <a:gd name="connsiteY0" fmla="*/ 580768 h 1172959"/>
+              <a:gd name="connsiteX1" fmla="*/ 1470454 w 6635579"/>
+              <a:gd name="connsiteY1" fmla="*/ 580768 h 1172959"/>
+              <a:gd name="connsiteX2" fmla="*/ 1779373 w 6635579"/>
+              <a:gd name="connsiteY2" fmla="*/ 24713 h 1172959"/>
+              <a:gd name="connsiteX3" fmla="*/ 2409568 w 6635579"/>
+              <a:gd name="connsiteY3" fmla="*/ 1161535 h 1172959"/>
+              <a:gd name="connsiteX4" fmla="*/ 3039762 w 6635579"/>
+              <a:gd name="connsiteY4" fmla="*/ 37070 h 1172959"/>
+              <a:gd name="connsiteX5" fmla="*/ 3645244 w 6635579"/>
+              <a:gd name="connsiteY5" fmla="*/ 1161535 h 1172959"/>
+              <a:gd name="connsiteX6" fmla="*/ 4275438 w 6635579"/>
+              <a:gd name="connsiteY6" fmla="*/ 0 h 1172959"/>
+              <a:gd name="connsiteX7" fmla="*/ 4917990 w 6635579"/>
+              <a:gd name="connsiteY7" fmla="*/ 1161535 h 1172959"/>
+              <a:gd name="connsiteX8" fmla="*/ 5263979 w 6635579"/>
+              <a:gd name="connsiteY8" fmla="*/ 593124 h 1172959"/>
+              <a:gd name="connsiteX9" fmla="*/ 6635579 w 6635579"/>
+              <a:gd name="connsiteY9" fmla="*/ 593124 h 1172959"/>
+              <a:gd name="connsiteX10" fmla="*/ 6635579 w 6635579"/>
+              <a:gd name="connsiteY10" fmla="*/ 593124 h 1172959"/>
+              <a:gd name="connsiteX11" fmla="*/ 6635579 w 6635579"/>
+              <a:gd name="connsiteY11" fmla="*/ 593124 h 1172959"/>
+              <a:gd name="connsiteX0" fmla="*/ 0 w 6635579"/>
+              <a:gd name="connsiteY0" fmla="*/ 580768 h 1172959"/>
+              <a:gd name="connsiteX1" fmla="*/ 1470454 w 6635579"/>
+              <a:gd name="connsiteY1" fmla="*/ 580768 h 1172959"/>
+              <a:gd name="connsiteX2" fmla="*/ 1779373 w 6635579"/>
+              <a:gd name="connsiteY2" fmla="*/ 24713 h 1172959"/>
+              <a:gd name="connsiteX3" fmla="*/ 2409568 w 6635579"/>
+              <a:gd name="connsiteY3" fmla="*/ 1161535 h 1172959"/>
+              <a:gd name="connsiteX4" fmla="*/ 3039762 w 6635579"/>
+              <a:gd name="connsiteY4" fmla="*/ 37070 h 1172959"/>
+              <a:gd name="connsiteX5" fmla="*/ 3645244 w 6635579"/>
+              <a:gd name="connsiteY5" fmla="*/ 1161535 h 1172959"/>
+              <a:gd name="connsiteX6" fmla="*/ 4275438 w 6635579"/>
+              <a:gd name="connsiteY6" fmla="*/ 0 h 1172959"/>
+              <a:gd name="connsiteX7" fmla="*/ 4917990 w 6635579"/>
+              <a:gd name="connsiteY7" fmla="*/ 1161535 h 1172959"/>
+              <a:gd name="connsiteX8" fmla="*/ 5263979 w 6635579"/>
+              <a:gd name="connsiteY8" fmla="*/ 593124 h 1172959"/>
+              <a:gd name="connsiteX9" fmla="*/ 6635579 w 6635579"/>
+              <a:gd name="connsiteY9" fmla="*/ 593124 h 1172959"/>
+              <a:gd name="connsiteX10" fmla="*/ 6635579 w 6635579"/>
+              <a:gd name="connsiteY10" fmla="*/ 593124 h 1172959"/>
+              <a:gd name="connsiteX11" fmla="*/ 6635579 w 6635579"/>
+              <a:gd name="connsiteY11" fmla="*/ 593124 h 1172959"/>
+              <a:gd name="connsiteX0" fmla="*/ 0 w 6635579"/>
+              <a:gd name="connsiteY0" fmla="*/ 580768 h 1172959"/>
+              <a:gd name="connsiteX1" fmla="*/ 1470454 w 6635579"/>
+              <a:gd name="connsiteY1" fmla="*/ 580768 h 1172959"/>
+              <a:gd name="connsiteX2" fmla="*/ 1779373 w 6635579"/>
+              <a:gd name="connsiteY2" fmla="*/ 24713 h 1172959"/>
+              <a:gd name="connsiteX3" fmla="*/ 2409568 w 6635579"/>
+              <a:gd name="connsiteY3" fmla="*/ 1161535 h 1172959"/>
+              <a:gd name="connsiteX4" fmla="*/ 3039762 w 6635579"/>
+              <a:gd name="connsiteY4" fmla="*/ 37070 h 1172959"/>
+              <a:gd name="connsiteX5" fmla="*/ 3645244 w 6635579"/>
+              <a:gd name="connsiteY5" fmla="*/ 1161535 h 1172959"/>
+              <a:gd name="connsiteX6" fmla="*/ 4275438 w 6635579"/>
+              <a:gd name="connsiteY6" fmla="*/ 0 h 1172959"/>
+              <a:gd name="connsiteX7" fmla="*/ 4917990 w 6635579"/>
+              <a:gd name="connsiteY7" fmla="*/ 1161535 h 1172959"/>
+              <a:gd name="connsiteX8" fmla="*/ 5263979 w 6635579"/>
+              <a:gd name="connsiteY8" fmla="*/ 593124 h 1172959"/>
+              <a:gd name="connsiteX9" fmla="*/ 6635579 w 6635579"/>
+              <a:gd name="connsiteY9" fmla="*/ 593124 h 1172959"/>
+              <a:gd name="connsiteX10" fmla="*/ 6635579 w 6635579"/>
+              <a:gd name="connsiteY10" fmla="*/ 593124 h 1172959"/>
+              <a:gd name="connsiteX11" fmla="*/ 6635579 w 6635579"/>
+              <a:gd name="connsiteY11" fmla="*/ 593124 h 1172959"/>
+              <a:gd name="connsiteX0" fmla="*/ 0 w 6635579"/>
+              <a:gd name="connsiteY0" fmla="*/ 580768 h 1172959"/>
+              <a:gd name="connsiteX1" fmla="*/ 1470454 w 6635579"/>
+              <a:gd name="connsiteY1" fmla="*/ 580768 h 1172959"/>
+              <a:gd name="connsiteX2" fmla="*/ 1779373 w 6635579"/>
+              <a:gd name="connsiteY2" fmla="*/ 24713 h 1172959"/>
+              <a:gd name="connsiteX3" fmla="*/ 2409568 w 6635579"/>
+              <a:gd name="connsiteY3" fmla="*/ 1161535 h 1172959"/>
+              <a:gd name="connsiteX4" fmla="*/ 3039762 w 6635579"/>
+              <a:gd name="connsiteY4" fmla="*/ 37070 h 1172959"/>
+              <a:gd name="connsiteX5" fmla="*/ 3645244 w 6635579"/>
+              <a:gd name="connsiteY5" fmla="*/ 1161535 h 1172959"/>
+              <a:gd name="connsiteX6" fmla="*/ 4275438 w 6635579"/>
+              <a:gd name="connsiteY6" fmla="*/ 0 h 1172959"/>
+              <a:gd name="connsiteX7" fmla="*/ 4917990 w 6635579"/>
+              <a:gd name="connsiteY7" fmla="*/ 1161535 h 1172959"/>
+              <a:gd name="connsiteX8" fmla="*/ 5263979 w 6635579"/>
+              <a:gd name="connsiteY8" fmla="*/ 593124 h 1172959"/>
+              <a:gd name="connsiteX9" fmla="*/ 6635579 w 6635579"/>
+              <a:gd name="connsiteY9" fmla="*/ 593124 h 1172959"/>
+              <a:gd name="connsiteX10" fmla="*/ 6635579 w 6635579"/>
+              <a:gd name="connsiteY10" fmla="*/ 593124 h 1172959"/>
+              <a:gd name="connsiteX11" fmla="*/ 6635579 w 6635579"/>
+              <a:gd name="connsiteY11" fmla="*/ 593124 h 1172959"/>
+              <a:gd name="connsiteX0" fmla="*/ 0 w 6635579"/>
+              <a:gd name="connsiteY0" fmla="*/ 580768 h 1172959"/>
+              <a:gd name="connsiteX1" fmla="*/ 1470454 w 6635579"/>
+              <a:gd name="connsiteY1" fmla="*/ 580768 h 1172959"/>
+              <a:gd name="connsiteX2" fmla="*/ 1779373 w 6635579"/>
+              <a:gd name="connsiteY2" fmla="*/ 24713 h 1172959"/>
+              <a:gd name="connsiteX3" fmla="*/ 2409568 w 6635579"/>
+              <a:gd name="connsiteY3" fmla="*/ 1161535 h 1172959"/>
+              <a:gd name="connsiteX4" fmla="*/ 3039762 w 6635579"/>
+              <a:gd name="connsiteY4" fmla="*/ 37070 h 1172959"/>
+              <a:gd name="connsiteX5" fmla="*/ 3645244 w 6635579"/>
+              <a:gd name="connsiteY5" fmla="*/ 1161535 h 1172959"/>
+              <a:gd name="connsiteX6" fmla="*/ 4275438 w 6635579"/>
+              <a:gd name="connsiteY6" fmla="*/ 0 h 1172959"/>
+              <a:gd name="connsiteX7" fmla="*/ 4917990 w 6635579"/>
+              <a:gd name="connsiteY7" fmla="*/ 1161535 h 1172959"/>
+              <a:gd name="connsiteX8" fmla="*/ 5263979 w 6635579"/>
+              <a:gd name="connsiteY8" fmla="*/ 593124 h 1172959"/>
+              <a:gd name="connsiteX9" fmla="*/ 6635579 w 6635579"/>
+              <a:gd name="connsiteY9" fmla="*/ 593124 h 1172959"/>
+              <a:gd name="connsiteX10" fmla="*/ 6635579 w 6635579"/>
+              <a:gd name="connsiteY10" fmla="*/ 593124 h 1172959"/>
+              <a:gd name="connsiteX11" fmla="*/ 6635579 w 6635579"/>
+              <a:gd name="connsiteY11" fmla="*/ 593124 h 1172959"/>
+              <a:gd name="connsiteX0" fmla="*/ 0 w 6635579"/>
+              <a:gd name="connsiteY0" fmla="*/ 580768 h 1172959"/>
+              <a:gd name="connsiteX1" fmla="*/ 1470454 w 6635579"/>
+              <a:gd name="connsiteY1" fmla="*/ 580768 h 1172959"/>
+              <a:gd name="connsiteX2" fmla="*/ 1779373 w 6635579"/>
+              <a:gd name="connsiteY2" fmla="*/ 24713 h 1172959"/>
+              <a:gd name="connsiteX3" fmla="*/ 2409568 w 6635579"/>
+              <a:gd name="connsiteY3" fmla="*/ 1161535 h 1172959"/>
+              <a:gd name="connsiteX4" fmla="*/ 3039762 w 6635579"/>
+              <a:gd name="connsiteY4" fmla="*/ 37070 h 1172959"/>
+              <a:gd name="connsiteX5" fmla="*/ 3645244 w 6635579"/>
+              <a:gd name="connsiteY5" fmla="*/ 1161535 h 1172959"/>
+              <a:gd name="connsiteX6" fmla="*/ 4275438 w 6635579"/>
+              <a:gd name="connsiteY6" fmla="*/ 0 h 1172959"/>
+              <a:gd name="connsiteX7" fmla="*/ 4917990 w 6635579"/>
+              <a:gd name="connsiteY7" fmla="*/ 1161535 h 1172959"/>
+              <a:gd name="connsiteX8" fmla="*/ 5263979 w 6635579"/>
+              <a:gd name="connsiteY8" fmla="*/ 593124 h 1172959"/>
+              <a:gd name="connsiteX9" fmla="*/ 6635579 w 6635579"/>
+              <a:gd name="connsiteY9" fmla="*/ 593124 h 1172959"/>
+              <a:gd name="connsiteX10" fmla="*/ 6635579 w 6635579"/>
+              <a:gd name="connsiteY10" fmla="*/ 593124 h 1172959"/>
+              <a:gd name="connsiteX11" fmla="*/ 6635579 w 6635579"/>
+              <a:gd name="connsiteY11" fmla="*/ 593124 h 1172959"/>
+              <a:gd name="connsiteX0" fmla="*/ 0 w 6635579"/>
+              <a:gd name="connsiteY0" fmla="*/ 580768 h 1172959"/>
+              <a:gd name="connsiteX1" fmla="*/ 1470454 w 6635579"/>
+              <a:gd name="connsiteY1" fmla="*/ 580768 h 1172959"/>
+              <a:gd name="connsiteX2" fmla="*/ 1779373 w 6635579"/>
+              <a:gd name="connsiteY2" fmla="*/ 24713 h 1172959"/>
+              <a:gd name="connsiteX3" fmla="*/ 2409568 w 6635579"/>
+              <a:gd name="connsiteY3" fmla="*/ 1161535 h 1172959"/>
+              <a:gd name="connsiteX4" fmla="*/ 3039762 w 6635579"/>
+              <a:gd name="connsiteY4" fmla="*/ 37070 h 1172959"/>
+              <a:gd name="connsiteX5" fmla="*/ 3645244 w 6635579"/>
+              <a:gd name="connsiteY5" fmla="*/ 1161535 h 1172959"/>
+              <a:gd name="connsiteX6" fmla="*/ 4275438 w 6635579"/>
+              <a:gd name="connsiteY6" fmla="*/ 0 h 1172959"/>
+              <a:gd name="connsiteX7" fmla="*/ 4917990 w 6635579"/>
+              <a:gd name="connsiteY7" fmla="*/ 1161535 h 1172959"/>
+              <a:gd name="connsiteX8" fmla="*/ 5263979 w 6635579"/>
+              <a:gd name="connsiteY8" fmla="*/ 593124 h 1172959"/>
+              <a:gd name="connsiteX9" fmla="*/ 6635579 w 6635579"/>
+              <a:gd name="connsiteY9" fmla="*/ 593124 h 1172959"/>
+              <a:gd name="connsiteX10" fmla="*/ 6635579 w 6635579"/>
+              <a:gd name="connsiteY10" fmla="*/ 593124 h 1172959"/>
+              <a:gd name="connsiteX11" fmla="*/ 6635579 w 6635579"/>
+              <a:gd name="connsiteY11" fmla="*/ 593124 h 1172959"/>
+              <a:gd name="connsiteX0" fmla="*/ 0 w 6635579"/>
+              <a:gd name="connsiteY0" fmla="*/ 580768 h 1172959"/>
+              <a:gd name="connsiteX1" fmla="*/ 1470454 w 6635579"/>
+              <a:gd name="connsiteY1" fmla="*/ 580768 h 1172959"/>
+              <a:gd name="connsiteX2" fmla="*/ 1779373 w 6635579"/>
+              <a:gd name="connsiteY2" fmla="*/ 24713 h 1172959"/>
+              <a:gd name="connsiteX3" fmla="*/ 2409568 w 6635579"/>
+              <a:gd name="connsiteY3" fmla="*/ 1161535 h 1172959"/>
+              <a:gd name="connsiteX4" fmla="*/ 3039762 w 6635579"/>
+              <a:gd name="connsiteY4" fmla="*/ 37070 h 1172959"/>
+              <a:gd name="connsiteX5" fmla="*/ 3645244 w 6635579"/>
+              <a:gd name="connsiteY5" fmla="*/ 1161535 h 1172959"/>
+              <a:gd name="connsiteX6" fmla="*/ 4275438 w 6635579"/>
+              <a:gd name="connsiteY6" fmla="*/ 0 h 1172959"/>
+              <a:gd name="connsiteX7" fmla="*/ 4917990 w 6635579"/>
+              <a:gd name="connsiteY7" fmla="*/ 1161535 h 1172959"/>
+              <a:gd name="connsiteX8" fmla="*/ 5263979 w 6635579"/>
+              <a:gd name="connsiteY8" fmla="*/ 593124 h 1172959"/>
+              <a:gd name="connsiteX9" fmla="*/ 6635579 w 6635579"/>
+              <a:gd name="connsiteY9" fmla="*/ 593124 h 1172959"/>
+              <a:gd name="connsiteX10" fmla="*/ 6635579 w 6635579"/>
+              <a:gd name="connsiteY10" fmla="*/ 593124 h 1172959"/>
+              <a:gd name="connsiteX11" fmla="*/ 6635579 w 6635579"/>
+              <a:gd name="connsiteY11" fmla="*/ 593124 h 1172959"/>
+              <a:gd name="connsiteX0" fmla="*/ 0 w 6635579"/>
+              <a:gd name="connsiteY0" fmla="*/ 580768 h 1172959"/>
+              <a:gd name="connsiteX1" fmla="*/ 1470454 w 6635579"/>
+              <a:gd name="connsiteY1" fmla="*/ 580768 h 1172959"/>
+              <a:gd name="connsiteX2" fmla="*/ 1779373 w 6635579"/>
+              <a:gd name="connsiteY2" fmla="*/ 24713 h 1172959"/>
+              <a:gd name="connsiteX3" fmla="*/ 2409568 w 6635579"/>
+              <a:gd name="connsiteY3" fmla="*/ 1161535 h 1172959"/>
+              <a:gd name="connsiteX4" fmla="*/ 3039762 w 6635579"/>
+              <a:gd name="connsiteY4" fmla="*/ 37070 h 1172959"/>
+              <a:gd name="connsiteX5" fmla="*/ 3645244 w 6635579"/>
+              <a:gd name="connsiteY5" fmla="*/ 1161535 h 1172959"/>
+              <a:gd name="connsiteX6" fmla="*/ 4275438 w 6635579"/>
+              <a:gd name="connsiteY6" fmla="*/ 0 h 1172959"/>
+              <a:gd name="connsiteX7" fmla="*/ 4917990 w 6635579"/>
+              <a:gd name="connsiteY7" fmla="*/ 1161535 h 1172959"/>
+              <a:gd name="connsiteX8" fmla="*/ 5263979 w 6635579"/>
+              <a:gd name="connsiteY8" fmla="*/ 593124 h 1172959"/>
+              <a:gd name="connsiteX9" fmla="*/ 6635579 w 6635579"/>
+              <a:gd name="connsiteY9" fmla="*/ 593124 h 1172959"/>
+              <a:gd name="connsiteX10" fmla="*/ 6635579 w 6635579"/>
+              <a:gd name="connsiteY10" fmla="*/ 593124 h 1172959"/>
+              <a:gd name="connsiteX11" fmla="*/ 6635579 w 6635579"/>
+              <a:gd name="connsiteY11" fmla="*/ 593124 h 1172959"/>
+              <a:gd name="connsiteX0" fmla="*/ 0 w 6635579"/>
+              <a:gd name="connsiteY0" fmla="*/ 580768 h 1172959"/>
+              <a:gd name="connsiteX1" fmla="*/ 1470454 w 6635579"/>
+              <a:gd name="connsiteY1" fmla="*/ 580768 h 1172959"/>
+              <a:gd name="connsiteX2" fmla="*/ 1779373 w 6635579"/>
+              <a:gd name="connsiteY2" fmla="*/ 24713 h 1172959"/>
+              <a:gd name="connsiteX3" fmla="*/ 2409568 w 6635579"/>
+              <a:gd name="connsiteY3" fmla="*/ 1161535 h 1172959"/>
+              <a:gd name="connsiteX4" fmla="*/ 3039762 w 6635579"/>
+              <a:gd name="connsiteY4" fmla="*/ 37070 h 1172959"/>
+              <a:gd name="connsiteX5" fmla="*/ 3645244 w 6635579"/>
+              <a:gd name="connsiteY5" fmla="*/ 1161535 h 1172959"/>
+              <a:gd name="connsiteX6" fmla="*/ 4275438 w 6635579"/>
+              <a:gd name="connsiteY6" fmla="*/ 0 h 1172959"/>
+              <a:gd name="connsiteX7" fmla="*/ 4917990 w 6635579"/>
+              <a:gd name="connsiteY7" fmla="*/ 1161535 h 1172959"/>
+              <a:gd name="connsiteX8" fmla="*/ 5263979 w 6635579"/>
+              <a:gd name="connsiteY8" fmla="*/ 593124 h 1172959"/>
+              <a:gd name="connsiteX9" fmla="*/ 6635579 w 6635579"/>
+              <a:gd name="connsiteY9" fmla="*/ 593124 h 1172959"/>
+              <a:gd name="connsiteX10" fmla="*/ 6635579 w 6635579"/>
+              <a:gd name="connsiteY10" fmla="*/ 593124 h 1172959"/>
+              <a:gd name="connsiteX11" fmla="*/ 6635579 w 6635579"/>
+              <a:gd name="connsiteY11" fmla="*/ 593124 h 1172959"/>
+              <a:gd name="connsiteX0" fmla="*/ 0 w 6635579"/>
+              <a:gd name="connsiteY0" fmla="*/ 580768 h 1172959"/>
+              <a:gd name="connsiteX1" fmla="*/ 1470454 w 6635579"/>
+              <a:gd name="connsiteY1" fmla="*/ 580768 h 1172959"/>
+              <a:gd name="connsiteX2" fmla="*/ 1779373 w 6635579"/>
+              <a:gd name="connsiteY2" fmla="*/ 24713 h 1172959"/>
+              <a:gd name="connsiteX3" fmla="*/ 2409568 w 6635579"/>
+              <a:gd name="connsiteY3" fmla="*/ 1161535 h 1172959"/>
+              <a:gd name="connsiteX4" fmla="*/ 3039762 w 6635579"/>
+              <a:gd name="connsiteY4" fmla="*/ 37070 h 1172959"/>
+              <a:gd name="connsiteX5" fmla="*/ 3645244 w 6635579"/>
+              <a:gd name="connsiteY5" fmla="*/ 1161535 h 1172959"/>
+              <a:gd name="connsiteX6" fmla="*/ 4275438 w 6635579"/>
+              <a:gd name="connsiteY6" fmla="*/ 0 h 1172959"/>
+              <a:gd name="connsiteX7" fmla="*/ 4917990 w 6635579"/>
+              <a:gd name="connsiteY7" fmla="*/ 1161535 h 1172959"/>
+              <a:gd name="connsiteX8" fmla="*/ 5263979 w 6635579"/>
+              <a:gd name="connsiteY8" fmla="*/ 593124 h 1172959"/>
+              <a:gd name="connsiteX9" fmla="*/ 6635579 w 6635579"/>
+              <a:gd name="connsiteY9" fmla="*/ 593124 h 1172959"/>
+              <a:gd name="connsiteX10" fmla="*/ 6635579 w 6635579"/>
+              <a:gd name="connsiteY10" fmla="*/ 593124 h 1172959"/>
+              <a:gd name="connsiteX11" fmla="*/ 6635579 w 6635579"/>
+              <a:gd name="connsiteY11" fmla="*/ 593124 h 1172959"/>
+              <a:gd name="connsiteX0" fmla="*/ 0 w 6635579"/>
+              <a:gd name="connsiteY0" fmla="*/ 580768 h 1172959"/>
+              <a:gd name="connsiteX1" fmla="*/ 1470454 w 6635579"/>
+              <a:gd name="connsiteY1" fmla="*/ 580768 h 1172959"/>
+              <a:gd name="connsiteX2" fmla="*/ 1779373 w 6635579"/>
+              <a:gd name="connsiteY2" fmla="*/ 24713 h 1172959"/>
+              <a:gd name="connsiteX3" fmla="*/ 2409568 w 6635579"/>
+              <a:gd name="connsiteY3" fmla="*/ 1161535 h 1172959"/>
+              <a:gd name="connsiteX4" fmla="*/ 3039762 w 6635579"/>
+              <a:gd name="connsiteY4" fmla="*/ 37070 h 1172959"/>
+              <a:gd name="connsiteX5" fmla="*/ 3645244 w 6635579"/>
+              <a:gd name="connsiteY5" fmla="*/ 1161535 h 1172959"/>
+              <a:gd name="connsiteX6" fmla="*/ 4275438 w 6635579"/>
+              <a:gd name="connsiteY6" fmla="*/ 0 h 1172959"/>
+              <a:gd name="connsiteX7" fmla="*/ 4917990 w 6635579"/>
+              <a:gd name="connsiteY7" fmla="*/ 1161535 h 1172959"/>
+              <a:gd name="connsiteX8" fmla="*/ 5263979 w 6635579"/>
+              <a:gd name="connsiteY8" fmla="*/ 593124 h 1172959"/>
+              <a:gd name="connsiteX9" fmla="*/ 6635579 w 6635579"/>
+              <a:gd name="connsiteY9" fmla="*/ 593124 h 1172959"/>
+              <a:gd name="connsiteX10" fmla="*/ 6635579 w 6635579"/>
+              <a:gd name="connsiteY10" fmla="*/ 593124 h 1172959"/>
+              <a:gd name="connsiteX11" fmla="*/ 6635579 w 6635579"/>
+              <a:gd name="connsiteY11" fmla="*/ 593124 h 1172959"/>
+              <a:gd name="connsiteX0" fmla="*/ 0 w 6635579"/>
+              <a:gd name="connsiteY0" fmla="*/ 580768 h 1161535"/>
+              <a:gd name="connsiteX1" fmla="*/ 1470454 w 6635579"/>
+              <a:gd name="connsiteY1" fmla="*/ 580768 h 1161535"/>
+              <a:gd name="connsiteX2" fmla="*/ 1779373 w 6635579"/>
+              <a:gd name="connsiteY2" fmla="*/ 24713 h 1161535"/>
+              <a:gd name="connsiteX3" fmla="*/ 2409568 w 6635579"/>
+              <a:gd name="connsiteY3" fmla="*/ 1161535 h 1161535"/>
+              <a:gd name="connsiteX4" fmla="*/ 3039762 w 6635579"/>
+              <a:gd name="connsiteY4" fmla="*/ 37070 h 1161535"/>
+              <a:gd name="connsiteX5" fmla="*/ 3645244 w 6635579"/>
+              <a:gd name="connsiteY5" fmla="*/ 1161535 h 1161535"/>
+              <a:gd name="connsiteX6" fmla="*/ 4275438 w 6635579"/>
+              <a:gd name="connsiteY6" fmla="*/ 0 h 1161535"/>
+              <a:gd name="connsiteX7" fmla="*/ 4917990 w 6635579"/>
+              <a:gd name="connsiteY7" fmla="*/ 1161535 h 1161535"/>
+              <a:gd name="connsiteX8" fmla="*/ 5263979 w 6635579"/>
+              <a:gd name="connsiteY8" fmla="*/ 593124 h 1161535"/>
+              <a:gd name="connsiteX9" fmla="*/ 6635579 w 6635579"/>
+              <a:gd name="connsiteY9" fmla="*/ 593124 h 1161535"/>
+              <a:gd name="connsiteX10" fmla="*/ 6635579 w 6635579"/>
+              <a:gd name="connsiteY10" fmla="*/ 593124 h 1161535"/>
+              <a:gd name="connsiteX11" fmla="*/ 6635579 w 6635579"/>
+              <a:gd name="connsiteY11" fmla="*/ 593124 h 1161535"/>
+              <a:gd name="connsiteX0" fmla="*/ 0 w 6635579"/>
+              <a:gd name="connsiteY0" fmla="*/ 580768 h 1161535"/>
+              <a:gd name="connsiteX1" fmla="*/ 1470454 w 6635579"/>
+              <a:gd name="connsiteY1" fmla="*/ 580768 h 1161535"/>
+              <a:gd name="connsiteX2" fmla="*/ 1779373 w 6635579"/>
+              <a:gd name="connsiteY2" fmla="*/ 24713 h 1161535"/>
+              <a:gd name="connsiteX3" fmla="*/ 2409568 w 6635579"/>
+              <a:gd name="connsiteY3" fmla="*/ 1161535 h 1161535"/>
+              <a:gd name="connsiteX4" fmla="*/ 3039762 w 6635579"/>
+              <a:gd name="connsiteY4" fmla="*/ 37070 h 1161535"/>
+              <a:gd name="connsiteX5" fmla="*/ 3645244 w 6635579"/>
+              <a:gd name="connsiteY5" fmla="*/ 1161535 h 1161535"/>
+              <a:gd name="connsiteX6" fmla="*/ 4275438 w 6635579"/>
+              <a:gd name="connsiteY6" fmla="*/ 0 h 1161535"/>
+              <a:gd name="connsiteX7" fmla="*/ 4917990 w 6635579"/>
+              <a:gd name="connsiteY7" fmla="*/ 1161535 h 1161535"/>
+              <a:gd name="connsiteX8" fmla="*/ 5263979 w 6635579"/>
+              <a:gd name="connsiteY8" fmla="*/ 593124 h 1161535"/>
+              <a:gd name="connsiteX9" fmla="*/ 6635579 w 6635579"/>
+              <a:gd name="connsiteY9" fmla="*/ 593124 h 1161535"/>
+              <a:gd name="connsiteX10" fmla="*/ 6635579 w 6635579"/>
+              <a:gd name="connsiteY10" fmla="*/ 593124 h 1161535"/>
+              <a:gd name="connsiteX11" fmla="*/ 6635579 w 6635579"/>
+              <a:gd name="connsiteY11" fmla="*/ 593124 h 1161535"/>
+              <a:gd name="connsiteX0" fmla="*/ 0 w 6635579"/>
+              <a:gd name="connsiteY0" fmla="*/ 580768 h 1161535"/>
+              <a:gd name="connsiteX1" fmla="*/ 1470454 w 6635579"/>
+              <a:gd name="connsiteY1" fmla="*/ 580768 h 1161535"/>
+              <a:gd name="connsiteX2" fmla="*/ 1779373 w 6635579"/>
+              <a:gd name="connsiteY2" fmla="*/ 24713 h 1161535"/>
+              <a:gd name="connsiteX3" fmla="*/ 2409568 w 6635579"/>
+              <a:gd name="connsiteY3" fmla="*/ 1161535 h 1161535"/>
+              <a:gd name="connsiteX4" fmla="*/ 3039762 w 6635579"/>
+              <a:gd name="connsiteY4" fmla="*/ 37070 h 1161535"/>
+              <a:gd name="connsiteX5" fmla="*/ 3645244 w 6635579"/>
+              <a:gd name="connsiteY5" fmla="*/ 1161535 h 1161535"/>
+              <a:gd name="connsiteX6" fmla="*/ 4275438 w 6635579"/>
+              <a:gd name="connsiteY6" fmla="*/ 0 h 1161535"/>
+              <a:gd name="connsiteX7" fmla="*/ 4917990 w 6635579"/>
+              <a:gd name="connsiteY7" fmla="*/ 1161535 h 1161535"/>
+              <a:gd name="connsiteX8" fmla="*/ 5263979 w 6635579"/>
+              <a:gd name="connsiteY8" fmla="*/ 593124 h 1161535"/>
+              <a:gd name="connsiteX9" fmla="*/ 6635579 w 6635579"/>
+              <a:gd name="connsiteY9" fmla="*/ 593124 h 1161535"/>
+              <a:gd name="connsiteX10" fmla="*/ 6635579 w 6635579"/>
+              <a:gd name="connsiteY10" fmla="*/ 593124 h 1161535"/>
+              <a:gd name="connsiteX11" fmla="*/ 6635579 w 6635579"/>
+              <a:gd name="connsiteY11" fmla="*/ 593124 h 1161535"/>
+              <a:gd name="connsiteX0" fmla="*/ 0 w 6635579"/>
+              <a:gd name="connsiteY0" fmla="*/ 580768 h 1161535"/>
+              <a:gd name="connsiteX1" fmla="*/ 1470454 w 6635579"/>
+              <a:gd name="connsiteY1" fmla="*/ 580768 h 1161535"/>
+              <a:gd name="connsiteX2" fmla="*/ 1779373 w 6635579"/>
+              <a:gd name="connsiteY2" fmla="*/ 24713 h 1161535"/>
+              <a:gd name="connsiteX3" fmla="*/ 2409568 w 6635579"/>
+              <a:gd name="connsiteY3" fmla="*/ 1161535 h 1161535"/>
+              <a:gd name="connsiteX4" fmla="*/ 3039762 w 6635579"/>
+              <a:gd name="connsiteY4" fmla="*/ 37070 h 1161535"/>
+              <a:gd name="connsiteX5" fmla="*/ 3645244 w 6635579"/>
+              <a:gd name="connsiteY5" fmla="*/ 1161535 h 1161535"/>
+              <a:gd name="connsiteX6" fmla="*/ 4275438 w 6635579"/>
+              <a:gd name="connsiteY6" fmla="*/ 0 h 1161535"/>
+              <a:gd name="connsiteX7" fmla="*/ 4917990 w 6635579"/>
+              <a:gd name="connsiteY7" fmla="*/ 1161535 h 1161535"/>
+              <a:gd name="connsiteX8" fmla="*/ 5263979 w 6635579"/>
+              <a:gd name="connsiteY8" fmla="*/ 593124 h 1161535"/>
+              <a:gd name="connsiteX9" fmla="*/ 6635579 w 6635579"/>
+              <a:gd name="connsiteY9" fmla="*/ 593124 h 1161535"/>
+              <a:gd name="connsiteX10" fmla="*/ 6635579 w 6635579"/>
+              <a:gd name="connsiteY10" fmla="*/ 593124 h 1161535"/>
+              <a:gd name="connsiteX11" fmla="*/ 6635579 w 6635579"/>
+              <a:gd name="connsiteY11" fmla="*/ 593124 h 1161535"/>
+              <a:gd name="connsiteX0" fmla="*/ 0 w 6635579"/>
+              <a:gd name="connsiteY0" fmla="*/ 580768 h 1161535"/>
+              <a:gd name="connsiteX1" fmla="*/ 1470454 w 6635579"/>
+              <a:gd name="connsiteY1" fmla="*/ 580768 h 1161535"/>
+              <a:gd name="connsiteX2" fmla="*/ 1779373 w 6635579"/>
+              <a:gd name="connsiteY2" fmla="*/ 24713 h 1161535"/>
+              <a:gd name="connsiteX3" fmla="*/ 2409568 w 6635579"/>
+              <a:gd name="connsiteY3" fmla="*/ 1161535 h 1161535"/>
+              <a:gd name="connsiteX4" fmla="*/ 3039762 w 6635579"/>
+              <a:gd name="connsiteY4" fmla="*/ 37070 h 1161535"/>
+              <a:gd name="connsiteX5" fmla="*/ 3645244 w 6635579"/>
+              <a:gd name="connsiteY5" fmla="*/ 1161535 h 1161535"/>
+              <a:gd name="connsiteX6" fmla="*/ 4275438 w 6635579"/>
+              <a:gd name="connsiteY6" fmla="*/ 0 h 1161535"/>
+              <a:gd name="connsiteX7" fmla="*/ 4917990 w 6635579"/>
+              <a:gd name="connsiteY7" fmla="*/ 1161535 h 1161535"/>
+              <a:gd name="connsiteX8" fmla="*/ 5263979 w 6635579"/>
+              <a:gd name="connsiteY8" fmla="*/ 593124 h 1161535"/>
+              <a:gd name="connsiteX9" fmla="*/ 6635579 w 6635579"/>
+              <a:gd name="connsiteY9" fmla="*/ 593124 h 1161535"/>
+              <a:gd name="connsiteX10" fmla="*/ 6635579 w 6635579"/>
+              <a:gd name="connsiteY10" fmla="*/ 593124 h 1161535"/>
+              <a:gd name="connsiteX11" fmla="*/ 6635579 w 6635579"/>
+              <a:gd name="connsiteY11" fmla="*/ 593124 h 1161535"/>
+            </a:gdLst>
+            <a:ahLst/>
+            <a:cxnLst>
+              <a:cxn ang="0">
+                <a:pos x="connsiteX0" y="connsiteY0"/>
+              </a:cxn>
+              <a:cxn ang="0">
+                <a:pos x="connsiteX1" y="connsiteY1"/>
+              </a:cxn>
+              <a:cxn ang="0">
+                <a:pos x="connsiteX2" y="connsiteY2"/>
+              </a:cxn>
+              <a:cxn ang="0">
+                <a:pos x="connsiteX3" y="connsiteY3"/>
+              </a:cxn>
+              <a:cxn ang="0">
+                <a:pos x="connsiteX4" y="connsiteY4"/>
+              </a:cxn>
+              <a:cxn ang="0">
+                <a:pos x="connsiteX5" y="connsiteY5"/>
+              </a:cxn>
+              <a:cxn ang="0">
+                <a:pos x="connsiteX6" y="connsiteY6"/>
+              </a:cxn>
+              <a:cxn ang="0">
+                <a:pos x="connsiteX7" y="connsiteY7"/>
+              </a:cxn>
+              <a:cxn ang="0">
+                <a:pos x="connsiteX8" y="connsiteY8"/>
+              </a:cxn>
+              <a:cxn ang="0">
+                <a:pos x="connsiteX9" y="connsiteY9"/>
+              </a:cxn>
+              <a:cxn ang="0">
+                <a:pos x="connsiteX10" y="connsiteY10"/>
+              </a:cxn>
+              <a:cxn ang="0">
+                <a:pos x="connsiteX11" y="connsiteY11"/>
+              </a:cxn>
+            </a:cxnLst>
+            <a:rect l="l" t="t" r="r" b="b"/>
+            <a:pathLst>
+              <a:path w="6635579" h="1161535">
+                <a:moveTo>
+                  <a:pt x="0" y="580768"/>
+                </a:moveTo>
+                <a:cubicBezTo>
+                  <a:pt x="586946" y="627106"/>
+                  <a:pt x="15652" y="589038"/>
+                  <a:pt x="1470454" y="580768"/>
+                </a:cubicBezTo>
+                <a:cubicBezTo>
+                  <a:pt x="1785773" y="19169"/>
+                  <a:pt x="1491556" y="589100"/>
+                  <a:pt x="1779373" y="24713"/>
+                </a:cubicBezTo>
+                <a:cubicBezTo>
+                  <a:pt x="2395437" y="1171895"/>
+                  <a:pt x="1791540" y="34061"/>
+                  <a:pt x="2409568" y="1161535"/>
+                </a:cubicBezTo>
+                <a:cubicBezTo>
+                  <a:pt x="3046353" y="33489"/>
+                  <a:pt x="2425853" y="1176553"/>
+                  <a:pt x="3039762" y="37070"/>
+                </a:cubicBezTo>
+                <a:cubicBezTo>
+                  <a:pt x="3653671" y="1181243"/>
+                  <a:pt x="3045402" y="42297"/>
+                  <a:pt x="3645244" y="1161535"/>
+                </a:cubicBezTo>
+                <a:cubicBezTo>
+                  <a:pt x="4287288" y="-2883"/>
+                  <a:pt x="3655351" y="1172307"/>
+                  <a:pt x="4275438" y="0"/>
+                </a:cubicBezTo>
+                <a:cubicBezTo>
+                  <a:pt x="4909592" y="1158240"/>
+                  <a:pt x="4288999" y="2915"/>
+                  <a:pt x="4917990" y="1161535"/>
+                </a:cubicBezTo>
+                <a:cubicBezTo>
+                  <a:pt x="5251560" y="589829"/>
+                  <a:pt x="4926132" y="1161472"/>
+                  <a:pt x="5263979" y="593124"/>
+                </a:cubicBezTo>
+                <a:lnTo>
+                  <a:pt x="6635579" y="593124"/>
+                </a:lnTo>
+                <a:lnTo>
+                  <a:pt x="6635579" y="593124"/>
+                </a:lnTo>
+                <a:lnTo>
+                  <a:pt x="6635579" y="593124"/>
+                </a:lnTo>
+              </a:path>
+            </a:pathLst>
+          </a:custGeom>
+          <a:noFill/>
+          <a:ln w="38100"/>
+        </p:spPr>
+        <p:style>
+          <a:lnRef idx="2">
+            <a:schemeClr val="accent1">
+              <a:shade val="15000"/>
+            </a:schemeClr>
+          </a:lnRef>
+          <a:fillRef idx="1">
+            <a:schemeClr val="accent1"/>
+          </a:fillRef>
+          <a:effectRef idx="0">
+            <a:schemeClr val="accent1"/>
+          </a:effectRef>
+          <a:fontRef idx="minor">
+            <a:schemeClr val="lt1"/>
+          </a:fontRef>
+        </p:style>
+        <p:txBody>
+          <a:bodyPr rtlCol="0" anchor="ctr"/>
+          <a:lstStyle/>
+          <a:p>
+            <a:pPr algn="ctr"/>
+            <a:endParaRPr lang="en-US"/>
+          </a:p>
+        </p:txBody>
+      </p:sp>
+      <p:sp>
+        <p:nvSpPr>
+          <p:cNvPr id="32" name="TextBox 31">
+            <a:extLst>
+              <a:ext uri="{FF2B5EF4-FFF2-40B4-BE49-F238E27FC236}">
+                <a16:creationId xmlns:a16="http://schemas.microsoft.com/office/drawing/2014/main" id="{BA5A4271-CD14-C0BC-FFF9-7509944E2EB4}"/>
+              </a:ext>
+            </a:extLst>
+          </p:cNvPr>
+          <p:cNvSpPr txBox="1"/>
+          <p:nvPr/>
+        </p:nvSpPr>
+        <p:spPr>
+          <a:xfrm>
+            <a:off x="5022058" y="2895405"/>
+            <a:ext cx="1101584" cy="369332"/>
+          </a:xfrm>
+          <a:prstGeom prst="rect">
+            <a:avLst/>
+          </a:prstGeom>
+          <a:noFill/>
+        </p:spPr>
+        <p:txBody>
+          <a:bodyPr wrap="none" rtlCol="0">
+            <a:spAutoFit/>
+          </a:bodyPr>
+          <a:lstStyle/>
+          <a:p>
+            <a:r>
+              <a:rPr lang="en-US" dirty="0"/>
+              <a:t>10K Ohm</a:t>
+            </a:r>
+          </a:p>
+        </p:txBody>
+      </p:sp>
+    </p:spTree>
+    <p:extLst>
+      <p:ext uri="{BB962C8B-B14F-4D97-AF65-F5344CB8AC3E}">
+        <p14:creationId xmlns:p14="http://schemas.microsoft.com/office/powerpoint/2010/main" val="3114415399"/>
       </p:ext>
     </p:extLst>
   </p:cSld>
